--- a/docs/reviews/first-review/Predictive_BMS_First_Review.pptx
+++ b/docs/reviews/first-review/Predictive_BMS_First_Review.pptx
@@ -25,7 +25,6 @@
     <p:sldId id="273" r:id="rId25"/>
     <p:sldId id="274" r:id="rId26"/>
     <p:sldId id="275" r:id="rId27"/>
-    <p:sldId id="276" r:id="rId28"/>
   </p:sldIdLst>
   <p:sldSz cx="12191695" cy="6858000" type="screen4x3"/>
   <p:notesSz cx="6858000" cy="9144000"/>
@@ -612,42 +611,47 @@
           <a:lstStyle/>
           <a:p>
             <a:r>
-              <a:t>On the left is the divider for a cell tap. All four taps use the same ratio, so</a:t>
-            </a:r>
-          </a:p>
-          <a:p>
-            <a:r>
-              <a:t>the top tap sets it: the full pack has to land inside the ADC range, which gives</a:t>
-            </a:r>
-          </a:p>
-          <a:p>
-            <a:r>
-              <a:t>0.128 and about 4.7 millivolts per count once it is referred back to the tap.</a:t>
-            </a:r>
-          </a:p>
-          <a:p>
-            <a:r>
-              <a:t>That is not precise enough for a production BMS, which is why I have noted an</a:t>
-            </a:r>
-          </a:p>
-          <a:p>
-            <a:r>
-              <a:t>external 16-bit converter as the upgrade path. On the right is the thermistor</a:t>
-            </a:r>
-          </a:p>
-          <a:p>
-            <a:r>
-              <a:t>input. The useful thing here is that a fixed calibration error cancels out when</a:t>
-            </a:r>
-          </a:p>
-          <a:p>
-            <a:r>
-              <a:t>you take a derivative, so the rate trip is far less sensitive to ADC error than</a:t>
-            </a:r>
-          </a:p>
-          <a:p>
-            <a:r>
-              <a:t>an absolute reading would be.</a:t>
+              <a:t>The two cut-off MOSFETs are wired source to source. That matters because a</a:t>
+            </a:r>
+          </a:p>
+          <a:p>
+            <a:r>
+              <a:t>single MOSFET has a body diode which would keep conducting in one direction even</a:t>
+            </a:r>
+          </a:p>
+          <a:p>
+            <a:r>
+              <a:t>when the device is off. With two facing opposite ways, each one blocks a</a:t>
+            </a:r>
+          </a:p>
+          <a:p>
+            <a:r>
+              <a:t>different direction, so I can stop charging and discharging separately. I chose</a:t>
+            </a:r>
+          </a:p>
+          <a:p>
+            <a:r>
+              <a:t>the IRLZ44N because it is a logic-level part, so a five volt gate is enough, and</a:t>
+            </a:r>
+          </a:p>
+          <a:p>
+            <a:r>
+              <a:t>its on-resistance is about 22 milliohms, which at ten amps is only a couple of</a:t>
+            </a:r>
+          </a:p>
+          <a:p>
+            <a:r>
+              <a:t>watts. On the right, each cell has its own bleed resistor and switch, and an</a:t>
+            </a:r>
+          </a:p>
+          <a:p>
+            <a:r>
+              <a:t>optocoupler keeps the drive isolated so one ground-referenced pin can switch a</a:t>
+            </a:r>
+          </a:p>
+          <a:p>
+            <a:r>
+              <a:t>cell sitting several volts up.</a:t>
             </a:r>
           </a:p>
         </p:txBody>
@@ -717,47 +721,42 @@
           <a:lstStyle/>
           <a:p>
             <a:r>
-              <a:t>The two cut-off MOSFETs are wired source to source. That matters because a</a:t>
-            </a:r>
-          </a:p>
-          <a:p>
-            <a:r>
-              <a:t>single MOSFET has a body diode which would keep conducting in one direction even</a:t>
-            </a:r>
-          </a:p>
-          <a:p>
-            <a:r>
-              <a:t>when the device is off. With two facing opposite ways, each one blocks a</a:t>
-            </a:r>
-          </a:p>
-          <a:p>
-            <a:r>
-              <a:t>different direction, so I can stop charging and discharging separately. I chose</a:t>
-            </a:r>
-          </a:p>
-          <a:p>
-            <a:r>
-              <a:t>the IRLZ44N because it is a logic-level part, so a five volt gate is enough, and</a:t>
-            </a:r>
-          </a:p>
-          <a:p>
-            <a:r>
-              <a:t>its on-resistance is about 22 milliohms, which at ten amps is only a couple of</a:t>
-            </a:r>
-          </a:p>
-          <a:p>
-            <a:r>
-              <a:t>watts. On the right, each cell has its own bleed resistor and switch, and an</a:t>
-            </a:r>
-          </a:p>
-          <a:p>
-            <a:r>
-              <a:t>optocoupler keeps the drive isolated so one ground-referenced pin can switch a</a:t>
-            </a:r>
-          </a:p>
-          <a:p>
-            <a:r>
-              <a:t>cell sitting several volts up.</a:t>
+              <a:t>The firmware runs three FreeRTOS tasks. The sensor task reads everything at ten</a:t>
+            </a:r>
+          </a:p>
+          <a:p>
+            <a:r>
+              <a:t>hertz and filters it. The safety task owns the state machine and is the only</a:t>
+            </a:r>
+          </a:p>
+          <a:p>
+            <a:r>
+              <a:t>thing allowed to touch the MOSFET pins, so there is no way for the telemetry</a:t>
+            </a:r>
+          </a:p>
+          <a:p>
+            <a:r>
+              <a:t>code to accidentally switch the pack. The telemetry task builds the JSON message</a:t>
+            </a:r>
+          </a:p>
+          <a:p>
+            <a:r>
+              <a:t>once a second. On the right is the state machine. The important part is that</a:t>
+            </a:r>
+          </a:p>
+          <a:p>
+            <a:r>
+              <a:t>leaving the cut-off state needs both a low rate and a low temperature, held for</a:t>
+            </a:r>
+          </a:p>
+          <a:p>
+            <a:r>
+              <a:t>five seconds, and after three trips in ten minutes it latches until someone</a:t>
+            </a:r>
+          </a:p>
+          <a:p>
+            <a:r>
+              <a:t>resets it by hand.</a:t>
             </a:r>
           </a:p>
         </p:txBody>
@@ -827,42 +826,47 @@
           <a:lstStyle/>
           <a:p>
             <a:r>
-              <a:t>The firmware runs three FreeRTOS tasks. The sensor task reads everything at ten</a:t>
-            </a:r>
-          </a:p>
-          <a:p>
-            <a:r>
-              <a:t>hertz and filters it. The safety task owns the state machine and is the only</a:t>
-            </a:r>
-          </a:p>
-          <a:p>
-            <a:r>
-              <a:t>thing allowed to touch the MOSFET pins, so there is no way for the telemetry</a:t>
-            </a:r>
-          </a:p>
-          <a:p>
-            <a:r>
-              <a:t>code to accidentally switch the pack. The telemetry task builds the JSON message</a:t>
-            </a:r>
-          </a:p>
-          <a:p>
-            <a:r>
-              <a:t>once a second. On the right is the state machine. The important part is that</a:t>
-            </a:r>
-          </a:p>
-          <a:p>
-            <a:r>
-              <a:t>leaving the cut-off state needs both a low rate and a low temperature, held for</a:t>
-            </a:r>
-          </a:p>
-          <a:p>
-            <a:r>
-              <a:t>five seconds, and after three trips in ten minutes it latches until someone</a:t>
-            </a:r>
-          </a:p>
-          <a:p>
-            <a:r>
-              <a:t>resets it by hand.</a:t>
+              <a:t>This is the core of the project in ten lines. The order matters. If you take the</a:t>
+            </a:r>
+          </a:p>
+          <a:p>
+            <a:r>
+              <a:t>slope of raw readings you mostly measure noise, because differentiating makes</a:t>
+            </a:r>
+          </a:p>
+          <a:p>
+            <a:r>
+              <a:t>noise worse, so the smoothing has to come first. Then the slope itself gets</a:t>
+            </a:r>
+          </a:p>
+          <a:p>
+            <a:r>
+              <a:t>smoothed again over a one second window. The threshold of one degree per second</a:t>
+            </a:r>
+          </a:p>
+          <a:p>
+            <a:r>
+              <a:t>comes from the Chen paper in my literature survey. The sixty degree line is</a:t>
+            </a:r>
+          </a:p>
+          <a:p>
+            <a:r>
+              <a:t>still there as a backstop, but in a real runaway the rate trip fires well before</a:t>
+            </a:r>
+          </a:p>
+          <a:p>
+            <a:r>
+              <a:t>it. The last point is the one I like most: because a derivative removes any</a:t>
+            </a:r>
+          </a:p>
+          <a:p>
+            <a:r>
+              <a:t>constant offset, a calibration error that would ruin an absolute reading has</a:t>
+            </a:r>
+          </a:p>
+          <a:p>
+            <a:r>
+              <a:t>almost no effect on the rate.</a:t>
             </a:r>
           </a:p>
         </p:txBody>
@@ -932,47 +936,42 @@
           <a:lstStyle/>
           <a:p>
             <a:r>
-              <a:t>This is the core of the project in ten lines. The order matters. If you take the</a:t>
-            </a:r>
-          </a:p>
-          <a:p>
-            <a:r>
-              <a:t>slope of raw readings you mostly measure noise, because differentiating makes</a:t>
-            </a:r>
-          </a:p>
-          <a:p>
-            <a:r>
-              <a:t>noise worse, so the smoothing has to come first. Then the slope itself gets</a:t>
-            </a:r>
-          </a:p>
-          <a:p>
-            <a:r>
-              <a:t>smoothed again over a one second window. The threshold of one degree per second</a:t>
-            </a:r>
-          </a:p>
-          <a:p>
-            <a:r>
-              <a:t>comes from the Chen paper in my literature survey. The sixty degree line is</a:t>
-            </a:r>
-          </a:p>
-          <a:p>
-            <a:r>
-              <a:t>still there as a backstop, but in a real runaway the rate trip fires well before</a:t>
-            </a:r>
-          </a:p>
-          <a:p>
-            <a:r>
-              <a:t>it. The last point is the one I like most: because a derivative removes any</a:t>
-            </a:r>
-          </a:p>
-          <a:p>
-            <a:r>
-              <a:t>constant offset, a calibration error that would ruin an absolute reading has</a:t>
-            </a:r>
-          </a:p>
-          <a:p>
-            <a:r>
-              <a:t>almost no effect on the rate.</a:t>
+              <a:t>This is a simulated curve, not measured data, and the slide says so. The cell</a:t>
+            </a:r>
+          </a:p>
+          <a:p>
+            <a:r>
+              <a:t>warms slowly, then self-heating takes over and the temperature climbs</a:t>
+            </a:r>
+          </a:p>
+          <a:p>
+            <a:r>
+              <a:t>exponentially. The green line is where the rate trip fires: thirty point eight</a:t>
+            </a:r>
+          </a:p>
+          <a:p>
+            <a:r>
+              <a:t>seconds, with the cell still at only thirty-six degrees. The red line is where a</a:t>
+            </a:r>
+          </a:p>
+          <a:p>
+            <a:r>
+              <a:t>fixed sixty degree limit would fire, at forty point four seconds. That is almost</a:t>
+            </a:r>
+          </a:p>
+          <a:p>
+            <a:r>
+              <a:t>ten seconds earlier, and more importantly the pack is twenty-four degrees cooler</a:t>
+            </a:r>
+          </a:p>
+          <a:p>
+            <a:r>
+              <a:t>when the power is removed. I will replace this with real bench data once the</a:t>
+            </a:r>
+          </a:p>
+          <a:p>
+            <a:r>
+              <a:t>prototype is running.</a:t>
             </a:r>
           </a:p>
         </p:txBody>
@@ -1042,42 +1041,32 @@
           <a:lstStyle/>
           <a:p>
             <a:r>
-              <a:t>This is a simulated curve, not measured data, and the slide says so. The cell</a:t>
-            </a:r>
-          </a:p>
-          <a:p>
-            <a:r>
-              <a:t>warms slowly, then self-heating takes over and the temperature climbs</a:t>
-            </a:r>
-          </a:p>
-          <a:p>
-            <a:r>
-              <a:t>exponentially. The green line is where the rate trip fires: thirty point eight</a:t>
-            </a:r>
-          </a:p>
-          <a:p>
-            <a:r>
-              <a:t>seconds, with the cell still at only thirty-six degrees. The red line is where a</a:t>
-            </a:r>
-          </a:p>
-          <a:p>
-            <a:r>
-              <a:t>fixed sixty degree limit would fire, at forty point four seconds. That is almost</a:t>
-            </a:r>
-          </a:p>
-          <a:p>
-            <a:r>
-              <a:t>ten seconds earlier, and more importantly the pack is twenty-four degrees cooler</a:t>
-            </a:r>
-          </a:p>
-          <a:p>
-            <a:r>
-              <a:t>when the power is removed. I will replace this with real bench data once the</a:t>
-            </a:r>
-          </a:p>
-          <a:p>
-            <a:r>
-              <a:t>prototype is running.</a:t>
+              <a:t>The ESP32 joins the local Wi-Fi and serves a small web page itself, so there is</a:t>
+            </a:r>
+          </a:p>
+          <a:p>
+            <a:r>
+              <a:t>no cloud account and no broker to set up. Once a second the telemetry task</a:t>
+            </a:r>
+          </a:p>
+          <a:p>
+            <a:r>
+              <a:t>builds the JSON message you can see at the bottom left, and pushes it over a</a:t>
+            </a:r>
+          </a:p>
+          <a:p>
+            <a:r>
+              <a:t>WebSocket. The browser draws live gauges and a rolling chart from that. The one</a:t>
+            </a:r>
+          </a:p>
+          <a:p>
+            <a:r>
+              <a:t>message going the other way is the command to clear a latched cut-off, and that</a:t>
+            </a:r>
+          </a:p>
+          <a:p>
+            <a:r>
+              <a:t>is deliberately the only thing the dashboard is allowed to do.</a:t>
             </a:r>
           </a:p>
         </p:txBody>
@@ -1147,32 +1136,32 @@
           <a:lstStyle/>
           <a:p>
             <a:r>
-              <a:t>The ESP32 joins the local Wi-Fi and serves a small web page itself, so there is</a:t>
-            </a:r>
-          </a:p>
-          <a:p>
-            <a:r>
-              <a:t>no cloud account and no broker to set up. Once a second the telemetry task</a:t>
-            </a:r>
-          </a:p>
-          <a:p>
-            <a:r>
-              <a:t>builds the JSON message you can see at the bottom left, and pushes it over a</a:t>
-            </a:r>
-          </a:p>
-          <a:p>
-            <a:r>
-              <a:t>WebSocket. The browser draws live gauges and a rolling chart from that. The one</a:t>
-            </a:r>
-          </a:p>
-          <a:p>
-            <a:r>
-              <a:t>message going the other way is the command to clear a latched cut-off, and that</a:t>
-            </a:r>
-          </a:p>
-          <a:p>
-            <a:r>
-              <a:t>is deliberately the only thing the dashboard is allowed to do.</a:t>
+              <a:t>This is the full parts list. It comes to about three thousand rupees, which is</a:t>
+            </a:r>
+          </a:p>
+          <a:p>
+            <a:r>
+              <a:t>within what I can fund myself. The thermistor price is the only one I have</a:t>
+            </a:r>
+          </a:p>
+          <a:p>
+            <a:r>
+              <a:t>confirmed on a live product page; the rest are the usual retail figures and I</a:t>
+            </a:r>
+          </a:p>
+          <a:p>
+            <a:r>
+              <a:t>have marked them as approximate. The cells are the biggest single line, and I</a:t>
+            </a:r>
+          </a:p>
+          <a:p>
+            <a:r>
+              <a:t>plan to buy them from a seller who will supply matched capacities, because</a:t>
+            </a:r>
+          </a:p>
+          <a:p>
+            <a:r>
+              <a:t>mismatched cells would make the balancing work much harder later.</a:t>
             </a:r>
           </a:p>
         </p:txBody>
@@ -1242,32 +1231,32 @@
           <a:lstStyle/>
           <a:p>
             <a:r>
-              <a:t>This is the full parts list. It comes to about three thousand rupees, which is</a:t>
-            </a:r>
-          </a:p>
-          <a:p>
-            <a:r>
-              <a:t>within what I can fund myself. The thermistor price is the only one I have</a:t>
-            </a:r>
-          </a:p>
-          <a:p>
-            <a:r>
-              <a:t>confirmed on a live product page; the rest are the usual retail figures and I</a:t>
-            </a:r>
-          </a:p>
-          <a:p>
-            <a:r>
-              <a:t>have marked them as approximate. The cells are the biggest single line, and I</a:t>
-            </a:r>
-          </a:p>
-          <a:p>
-            <a:r>
-              <a:t>plan to buy them from a seller who will supply matched capacities, because</a:t>
-            </a:r>
-          </a:p>
-          <a:p>
-            <a:r>
-              <a:t>mismatched cells would make the balancing work much harder later.</a:t>
+              <a:t>This is where I actually am. The approvals phase is finished. Procurement is the</a:t>
+            </a:r>
+          </a:p>
+          <a:p>
+            <a:r>
+              <a:t>live one: the parts list is final and priced, and I am placing the order this</a:t>
+            </a:r>
+          </a:p>
+          <a:p>
+            <a:r>
+              <a:t>week. Nothing on the bench has been built yet, which is honest, but the design</a:t>
+            </a:r>
+          </a:p>
+          <a:p>
+            <a:r>
+              <a:t>work for the later phases is not zero either. The algorithm and the state</a:t>
+            </a:r>
+          </a:p>
+          <a:p>
+            <a:r>
+              <a:t>machine are worked out on paper, and the telemetry message format is decided, so</a:t>
+            </a:r>
+          </a:p>
+          <a:p>
+            <a:r>
+              <a:t>those phases should move quickly once the hardware exists.</a:t>
             </a:r>
           </a:p>
         </p:txBody>
@@ -1337,32 +1326,37 @@
           <a:lstStyle/>
           <a:p>
             <a:r>
-              <a:t>This is where I actually am. The approvals phase is finished. Procurement is the</a:t>
-            </a:r>
-          </a:p>
-          <a:p>
-            <a:r>
-              <a:t>live one: the parts list is final and priced, and I am placing the order this</a:t>
-            </a:r>
-          </a:p>
-          <a:p>
-            <a:r>
-              <a:t>week. Nothing on the bench has been built yet, which is honest, but the design</a:t>
-            </a:r>
-          </a:p>
-          <a:p>
-            <a:r>
-              <a:t>work for the later phases is not zero either. The algorithm and the state</a:t>
-            </a:r>
-          </a:p>
-          <a:p>
-            <a:r>
-              <a:t>machine are worked out on paper, and the telemetry message format is decided, so</a:t>
-            </a:r>
-          </a:p>
-          <a:p>
-            <a:r>
-              <a:t>those phases should move quickly once the hardware exists.</a:t>
+              <a:t>This is the plan for the rest of the semester, twelve weeks from the end of</a:t>
+            </a:r>
+          </a:p>
+          <a:p>
+            <a:r>
+              <a:t>August. Procurement takes two weeks. Prototyping overlaps with it slightly</a:t>
+            </a:r>
+          </a:p>
+          <a:p>
+            <a:r>
+              <a:t>because I can start the sensing board before the cells arrive. The software</a:t>
+            </a:r>
+          </a:p>
+          <a:p>
+            <a:r>
+              <a:t>phase is the longest at four and a half weeks, and it deliberately overlaps</a:t>
+            </a:r>
+          </a:p>
+          <a:p>
+            <a:r>
+              <a:t>prototyping, since I can test the reading and filtering code on the bench supply</a:t>
+            </a:r>
+          </a:p>
+          <a:p>
+            <a:r>
+              <a:t>before the pack is finished. The four dashed lines are the checkpoints I am</a:t>
+            </a:r>
+          </a:p>
+          <a:p>
+            <a:r>
+              <a:t>holding myself to.</a:t>
             </a:r>
           </a:p>
         </p:txBody>
@@ -1432,37 +1426,27 @@
           <a:lstStyle/>
           <a:p>
             <a:r>
-              <a:t>This is the plan for the rest of the semester, twelve weeks from the end of</a:t>
-            </a:r>
-          </a:p>
-          <a:p>
-            <a:r>
-              <a:t>August. Procurement takes two weeks. Prototyping overlaps with it slightly</a:t>
-            </a:r>
-          </a:p>
-          <a:p>
-            <a:r>
-              <a:t>because I can start the sensing board before the cells arrive. The software</a:t>
-            </a:r>
-          </a:p>
-          <a:p>
-            <a:r>
-              <a:t>phase is the longest at four and a half weeks, and it deliberately overlaps</a:t>
-            </a:r>
-          </a:p>
-          <a:p>
-            <a:r>
-              <a:t>prototyping, since I can test the reading and filtering code on the bench supply</a:t>
-            </a:r>
-          </a:p>
-          <a:p>
-            <a:r>
-              <a:t>before the pack is finished. The four dashed lines are the checkpoints I am</a:t>
-            </a:r>
-          </a:p>
-          <a:p>
-            <a:r>
-              <a:t>holding myself to.</a:t>
+              <a:t>These are the four things I expect to be able to show at the end. The second one</a:t>
+            </a:r>
+          </a:p>
+          <a:p>
+            <a:r>
+              <a:t>is the real test of the project, and I plan to prove it by warming a cell with a</a:t>
+            </a:r>
+          </a:p>
+          <a:p>
+            <a:r>
+              <a:t>small heater and recording when each trip fires. The last point matters for a</a:t>
+            </a:r>
+          </a:p>
+          <a:p>
+            <a:r>
+              <a:t>college project: everything on the list can be bought locally, so the work can</a:t>
+            </a:r>
+          </a:p>
+          <a:p>
+            <a:r>
+              <a:t>actually be repeated by someone else in the department.</a:t>
             </a:r>
           </a:p>
         </p:txBody>
@@ -1532,27 +1516,22 @@
           <a:lstStyle/>
           <a:p>
             <a:r>
-              <a:t>These are the four things I expect to be able to show at the end. The second one</a:t>
-            </a:r>
-          </a:p>
-          <a:p>
-            <a:r>
-              <a:t>is the real test of the project, and I plan to prove it by warming a cell with a</a:t>
-            </a:r>
-          </a:p>
-          <a:p>
-            <a:r>
-              <a:t>small heater and recording when each trip fires. The last point matters for a</a:t>
-            </a:r>
-          </a:p>
-          <a:p>
-            <a:r>
-              <a:t>college project: everything on the list can be bought locally, so the work can</a:t>
-            </a:r>
-          </a:p>
-          <a:p>
-            <a:r>
-              <a:t>actually be repeated by someone else in the department.</a:t>
+              <a:t>These are the five sources I have used. The first four are the papers in my</a:t>
+            </a:r>
+          </a:p>
+          <a:p>
+            <a:r>
+              <a:t>literature survey table, numbered in the same order. The last one is the Indian</a:t>
+            </a:r>
+          </a:p>
+          <a:p>
+            <a:r>
+              <a:t>standard that covers sealed lithium cells, and it is the standard whose abuse</a:t>
+            </a:r>
+          </a:p>
+          <a:p>
+            <a:r>
+              <a:t>tests my design is aimed at, although I am not claiming any certification.</a:t>
             </a:r>
           </a:p>
         </p:txBody>
@@ -1622,27 +1601,27 @@
           <a:lstStyle/>
           <a:p>
             <a:r>
-              <a:t>This is the order I will follow. I will start with what was approved in the</a:t>
-            </a:r>
-          </a:p>
-          <a:p>
-            <a:r>
-              <a:t>zeroth review, then explain the problem I am solving and why the usual approach</a:t>
-            </a:r>
-          </a:p>
-          <a:p>
-            <a:r>
-              <a:t>falls short. After that I will go through the circuit design in detail, then the</a:t>
-            </a:r>
-          </a:p>
-          <a:p>
-            <a:r>
-              <a:t>firmware and the algorithm that does the prediction. I will finish with the</a:t>
-            </a:r>
-          </a:p>
-          <a:p>
-            <a:r>
-              <a:t>cost, what I have finished so far, and the plan for the rest of the semester.</a:t>
+              <a:t>This is the order I will follow. I will start with the problem I am solving and</a:t>
+            </a:r>
+          </a:p>
+          <a:p>
+            <a:r>
+              <a:t>why the usual approach falls short. After that I will go through the circuit</a:t>
+            </a:r>
+          </a:p>
+          <a:p>
+            <a:r>
+              <a:t>design in detail, then the firmware and the algorithm that does the prediction.</a:t>
+            </a:r>
+          </a:p>
+          <a:p>
+            <a:r>
+              <a:t>I will finish with the cost, what I have finished so far, and the plan for the</a:t>
+            </a:r>
+          </a:p>
+          <a:p>
+            <a:r>
+              <a:t>rest of the semester.</a:t>
             </a:r>
           </a:p>
         </p:txBody>
@@ -1712,91 +1691,6 @@
           <a:lstStyle/>
           <a:p>
             <a:r>
-              <a:t>These are the five sources I have used. The first four are the papers in my</a:t>
-            </a:r>
-          </a:p>
-          <a:p>
-            <a:r>
-              <a:t>literature survey table, numbered in the same order. The last one is the Indian</a:t>
-            </a:r>
-          </a:p>
-          <a:p>
-            <a:r>
-              <a:t>standard that covers sealed lithium cells, and it is the standard whose abuse</a:t>
-            </a:r>
-          </a:p>
-          <a:p>
-            <a:r>
-              <a:t>tests my design is aimed at, although I am not claiming any certification.</a:t>
-            </a:r>
-          </a:p>
-        </p:txBody>
-      </p:sp>
-      <p:sp>
-        <p:nvSpPr>
-          <p:cNvPr id="4" name="Slide Number Placeholder 3"/>
-          <p:cNvSpPr>
-            <a:spLocks noGrp="1"/>
-          </p:cNvSpPr>
-          <p:nvPr>
-            <p:ph type="sldNum" idx="5" sz="quarter"/>
-          </p:nvPr>
-        </p:nvSpPr>
-        <p:spPr/>
-      </p:sp>
-    </p:spTree>
-  </p:cSld>
-  <p:clrMapOvr>
-    <a:masterClrMapping/>
-  </p:clrMapOvr>
-</p:notes>
-</file>
-
-<file path=ppt/notesSlides/notesSlide21.xml><?xml version="1.0" encoding="utf-8"?>
-<p:notes xmlns:a="http://schemas.openxmlformats.org/drawingml/2006/main" xmlns:p="http://schemas.openxmlformats.org/presentationml/2006/main" xmlns:r="http://schemas.openxmlformats.org/officeDocument/2006/relationships">
-  <p:cSld>
-    <p:spTree>
-      <p:nvGrpSpPr>
-        <p:cNvPr id="1" name=""/>
-        <p:cNvGrpSpPr/>
-        <p:nvPr/>
-      </p:nvGrpSpPr>
-      <p:grpSpPr>
-        <a:xfrm>
-          <a:off x="0" y="0"/>
-          <a:ext cx="0" cy="0"/>
-          <a:chOff x="0" y="0"/>
-          <a:chExt cx="0" cy="0"/>
-        </a:xfrm>
-      </p:grpSpPr>
-      <p:sp>
-        <p:nvSpPr>
-          <p:cNvPr id="2" name="Slide Image Placeholder 1"/>
-          <p:cNvSpPr>
-            <a:spLocks noGrp="1"/>
-          </p:cNvSpPr>
-          <p:nvPr>
-            <p:ph type="sldImg" idx="2"/>
-          </p:nvPr>
-        </p:nvSpPr>
-        <p:spPr/>
-      </p:sp>
-      <p:sp>
-        <p:nvSpPr>
-          <p:cNvPr id="3" name="Notes Placeholder 2"/>
-          <p:cNvSpPr>
-            <a:spLocks noGrp="1"/>
-          </p:cNvSpPr>
-          <p:nvPr>
-            <p:ph type="body" idx="3" sz="quarter"/>
-          </p:nvPr>
-        </p:nvSpPr>
-        <p:spPr/>
-        <p:txBody>
-          <a:bodyPr/>
-          <a:lstStyle/>
-          <a:p>
-            <a:r>
               <a:t>That is the end of my presentation. Thank you for listening. I am happy to take</a:t>
             </a:r>
           </a:p>
@@ -1872,27 +1766,37 @@
           <a:lstStyle/>
           <a:p>
             <a:r>
-              <a:t>In the zeroth review I presented the idea and a block diagram, and the panel</a:t>
-            </a:r>
-          </a:p>
-          <a:p>
-            <a:r>
-              <a:t>approved it. My guide signed off after that, so the approvals phase is finished.</a:t>
-            </a:r>
-          </a:p>
-          <a:p>
-            <a:r>
-              <a:t>Since then I have done the detailed work: I picked real component values,</a:t>
-            </a:r>
-          </a:p>
-          <a:p>
-            <a:r>
-              <a:t>worked out what the ADC can actually resolve, and priced the full parts list.</a:t>
-            </a:r>
-          </a:p>
-          <a:p>
-            <a:r>
-              <a:t>Today I want to show that detail and get feedback before I start building.</a:t>
+              <a:t>This is the gap I am working on. Almost every small battery protection board</a:t>
+            </a:r>
+          </a:p>
+          <a:p>
+            <a:r>
+              <a:t>uses one rule: if the temperature goes above a set value, disconnect. The</a:t>
+            </a:r>
+          </a:p>
+          <a:p>
+            <a:r>
+              <a:t>problem is that the set value tells you nothing until it is reached. A cell that</a:t>
+            </a:r>
+          </a:p>
+          <a:p>
+            <a:r>
+              <a:t>is heating one degree every second is clearly in trouble even when it is only at</a:t>
+            </a:r>
+          </a:p>
+          <a:p>
+            <a:r>
+              <a:t>thirty-five degrees, but a fixed limit ignores that completely. On top of that,</a:t>
+            </a:r>
+          </a:p>
+          <a:p>
+            <a:r>
+              <a:t>the thermistor sits on the outside of the can, so the inside is always hotter</a:t>
+            </a:r>
+          </a:p>
+          <a:p>
+            <a:r>
+              <a:t>than what I measure. Waiting for an absolute number means acting late.</a:t>
             </a:r>
           </a:p>
         </p:txBody>
@@ -1962,37 +1866,27 @@
           <a:lstStyle/>
           <a:p>
             <a:r>
-              <a:t>This is the gap I am working on. Almost every small battery protection board</a:t>
-            </a:r>
-          </a:p>
-          <a:p>
-            <a:r>
-              <a:t>uses one rule: if the temperature goes above a set value, disconnect. The</a:t>
-            </a:r>
-          </a:p>
-          <a:p>
-            <a:r>
-              <a:t>problem is that the set value tells you nothing until it is reached. A cell that</a:t>
-            </a:r>
-          </a:p>
-          <a:p>
-            <a:r>
-              <a:t>is heating one degree every second is clearly in trouble even when it is only at</a:t>
-            </a:r>
-          </a:p>
-          <a:p>
-            <a:r>
-              <a:t>thirty-five degrees, but a fixed limit ignores that completely. On top of that,</a:t>
-            </a:r>
-          </a:p>
-          <a:p>
-            <a:r>
-              <a:t>the thermistor sits on the outside of the can, so the inside is always hotter</a:t>
-            </a:r>
-          </a:p>
-          <a:p>
-            <a:r>
-              <a:t>than what I measure. Waiting for an absolute number means acting late.</a:t>
+              <a:t>These are the five things I want to have working by the end of the project. The</a:t>
+            </a:r>
+          </a:p>
+          <a:p>
+            <a:r>
+              <a:t>third one is the new part and the reason for the project. The fourth matters</a:t>
+            </a:r>
+          </a:p>
+          <a:p>
+            <a:r>
+              <a:t>because a pack that is too cold to charge is still perfectly safe to discharge,</a:t>
+            </a:r>
+          </a:p>
+          <a:p>
+            <a:r>
+              <a:t>so cutting both directions together would be crude. The last one is what makes</a:t>
+            </a:r>
+          </a:p>
+          <a:p>
+            <a:r>
+              <a:t>it possible to actually see what the board is doing while it runs.</a:t>
             </a:r>
           </a:p>
         </p:txBody>
@@ -2062,27 +1956,37 @@
           <a:lstStyle/>
           <a:p>
             <a:r>
-              <a:t>These are the five things I want to have working by the end of the project. The</a:t>
-            </a:r>
-          </a:p>
-          <a:p>
-            <a:r>
-              <a:t>third one is the new part and the reason for the project. The fourth matters</a:t>
-            </a:r>
-          </a:p>
-          <a:p>
-            <a:r>
-              <a:t>because a pack that is too cold to charge is still perfectly safe to discharge,</a:t>
-            </a:r>
-          </a:p>
-          <a:p>
-            <a:r>
-              <a:t>so cutting both directions together would be crude. The last one is what makes</a:t>
-            </a:r>
-          </a:p>
-          <a:p>
-            <a:r>
-              <a:t>it possible to actually see what the board is doing while it runs.</a:t>
+              <a:t>These four papers frame the work. Feng and his co-authors explain what actually</a:t>
+            </a:r>
+          </a:p>
+          <a:p>
+            <a:r>
+              <a:t>happens inside a cell as it runs away, and that is where the physics comes from.</a:t>
+            </a:r>
+          </a:p>
+          <a:p>
+            <a:r>
+              <a:t>Zhang's review shows that most early-warning work needs extra hardware or a</a:t>
+            </a:r>
+          </a:p>
+          <a:p>
+            <a:r>
+              <a:t>server behind it, which a student project cannot use. The Chen paper is the</a:t>
+            </a:r>
+          </a:p>
+          <a:p>
+            <a:r>
+              <a:t>closest to what I am doing, and it is where my one degree per second threshold</a:t>
+            </a:r>
+          </a:p>
+          <a:p>
+            <a:r>
+              <a:t>comes from. Habib's review lists thermal runaway as an open problem but does not</a:t>
+            </a:r>
+          </a:p>
+          <a:p>
+            <a:r>
+              <a:t>build anything, and that is the gap I am filling.</a:t>
             </a:r>
           </a:p>
         </p:txBody>
@@ -2152,37 +2056,32 @@
           <a:lstStyle/>
           <a:p>
             <a:r>
-              <a:t>These four papers frame the work. Feng and his co-authors explain what actually</a:t>
-            </a:r>
-          </a:p>
-          <a:p>
-            <a:r>
-              <a:t>happens inside a cell as it runs away, and that is where the physics comes from.</a:t>
-            </a:r>
-          </a:p>
-          <a:p>
-            <a:r>
-              <a:t>Zhang's review shows that most early-warning work needs extra hardware or a</a:t>
-            </a:r>
-          </a:p>
-          <a:p>
-            <a:r>
-              <a:t>server behind it, which a student project cannot use. The Chen paper is the</a:t>
-            </a:r>
-          </a:p>
-          <a:p>
-            <a:r>
-              <a:t>closest to what I am doing, and it is where my one degree per second threshold</a:t>
-            </a:r>
-          </a:p>
-          <a:p>
-            <a:r>
-              <a:t>comes from. Habib's review lists thermal runaway as an open problem but does not</a:t>
-            </a:r>
-          </a:p>
-          <a:p>
-            <a:r>
-              <a:t>build anything, and that is the gap I am filling.</a:t>
+              <a:t>This is the whole system on one page. The pack feeds the sensing front end,</a:t>
+            </a:r>
+          </a:p>
+          <a:p>
+            <a:r>
+              <a:t>which reports voltage, current and temperature to the ESP32. The ESP32 runs the</a:t>
+            </a:r>
+          </a:p>
+          <a:p>
+            <a:r>
+              <a:t>maths and drives two MOSFETs that sit in the pack's negative return. The same</a:t>
+            </a:r>
+          </a:p>
+          <a:p>
+            <a:r>
+              <a:t>readings go out over Wi-Fi to a dashboard. The one thing worth pointing out is</a:t>
+            </a:r>
+          </a:p>
+          <a:p>
+            <a:r>
+              <a:t>the note at the bottom: the ESP32's second ADC block cannot be used while Wi-Fi</a:t>
+            </a:r>
+          </a:p>
+          <a:p>
+            <a:r>
+              <a:t>is running, so every analogue input has to go to the first block.</a:t>
             </a:r>
           </a:p>
         </p:txBody>
@@ -2252,32 +2151,32 @@
           <a:lstStyle/>
           <a:p>
             <a:r>
-              <a:t>This is the whole system on one page. The pack feeds the sensing front end,</a:t>
-            </a:r>
-          </a:p>
-          <a:p>
-            <a:r>
-              <a:t>which reports voltage, current and temperature to the ESP32. The ESP32 runs the</a:t>
-            </a:r>
-          </a:p>
-          <a:p>
-            <a:r>
-              <a:t>maths and drives two MOSFETs that sit in the pack's negative return. The same</a:t>
-            </a:r>
-          </a:p>
-          <a:p>
-            <a:r>
-              <a:t>readings go out over Wi-Fi to a dashboard. The one thing worth pointing out is</a:t>
-            </a:r>
-          </a:p>
-          <a:p>
-            <a:r>
-              <a:t>the note at the bottom: the ESP32's second ADC block cannot be used while Wi-Fi</a:t>
-            </a:r>
-          </a:p>
-          <a:p>
-            <a:r>
-              <a:t>is running, so every analogue input has to go to the first block.</a:t>
+              <a:t>This is the same system with the real parts in it. Four cell taps go through</a:t>
+            </a:r>
+          </a:p>
+          <a:p>
+            <a:r>
+              <a:t>dividers into the first ADC block. Four thermistors go through a CD4051 analogue</a:t>
+            </a:r>
+          </a:p>
+          <a:p>
+            <a:r>
+              <a:t>multiplexer, because a DevKit board only exposes six usable ADC1 pins and I need</a:t>
+            </a:r>
+          </a:p>
+          <a:p>
+            <a:r>
+              <a:t>eight channels. Current is measured by an INA226 over I2C, which costs no ADC</a:t>
+            </a:r>
+          </a:p>
+          <a:p>
+            <a:r>
+              <a:t>pin at all. A buck module makes the 3.3 volt rail, not a linear regulator,</a:t>
+            </a:r>
+          </a:p>
+          <a:p>
+            <a:r>
+              <a:t>because dropping thirteen volts in a linear part would waste about two watts.</a:t>
             </a:r>
           </a:p>
         </p:txBody>
@@ -2347,32 +2246,32 @@
           <a:lstStyle/>
           <a:p>
             <a:r>
-              <a:t>This is the same system with the real parts in it. Four cell taps go through</a:t>
-            </a:r>
-          </a:p>
-          <a:p>
-            <a:r>
-              <a:t>dividers into the first ADC block. Four thermistors go through a CD4051 analogue</a:t>
-            </a:r>
-          </a:p>
-          <a:p>
-            <a:r>
-              <a:t>multiplexer, because a DevKit board only exposes six usable ADC1 pins and I need</a:t>
-            </a:r>
-          </a:p>
-          <a:p>
-            <a:r>
-              <a:t>eight channels. Current is measured by an INA226 over I2C, which costs no ADC</a:t>
-            </a:r>
-          </a:p>
-          <a:p>
-            <a:r>
-              <a:t>pin at all. A buck module makes the 3.3 volt rail, not a linear regulator,</a:t>
-            </a:r>
-          </a:p>
-          <a:p>
-            <a:r>
-              <a:t>because dropping thirteen volts in a linear part would waste about two watts.</a:t>
+              <a:t>This is the power path on its own. The fuse sits in the positive line as the</a:t>
+            </a:r>
+          </a:p>
+          <a:p>
+            <a:r>
+              <a:t>last-resort protection if the electronics fail completely. Both MOSFETs sit in</a:t>
+            </a:r>
+          </a:p>
+          <a:p>
+            <a:r>
+              <a:t>the negative return, which is the same arrangement commercial protection boards</a:t>
+            </a:r>
+          </a:p>
+          <a:p>
+            <a:r>
+              <a:t>use, because it lets both gates be driven against system ground with no charge</a:t>
+            </a:r>
+          </a:p>
+          <a:p>
+            <a:r>
+              <a:t>pump. The circles are the measurement points: cell voltages at the taps, pack</a:t>
+            </a:r>
+          </a:p>
+          <a:p>
+            <a:r>
+              <a:t>current across the shunt, and temperature at the cells themselves.</a:t>
             </a:r>
           </a:p>
         </p:txBody>
@@ -2442,32 +2341,42 @@
           <a:lstStyle/>
           <a:p>
             <a:r>
-              <a:t>This is the power path on its own. The fuse sits in the positive line as the</a:t>
-            </a:r>
-          </a:p>
-          <a:p>
-            <a:r>
-              <a:t>last-resort protection if the electronics fail completely. Both MOSFETs sit in</a:t>
-            </a:r>
-          </a:p>
-          <a:p>
-            <a:r>
-              <a:t>the negative return, which is the same arrangement commercial protection boards</a:t>
-            </a:r>
-          </a:p>
-          <a:p>
-            <a:r>
-              <a:t>use, because it lets both gates be driven against system ground with no charge</a:t>
-            </a:r>
-          </a:p>
-          <a:p>
-            <a:r>
-              <a:t>pump. The circles are the measurement points: cell voltages at the taps, pack</a:t>
-            </a:r>
-          </a:p>
-          <a:p>
-            <a:r>
-              <a:t>current across the shunt, and temperature at the cells themselves.</a:t>
+              <a:t>On the left is the divider for a cell tap. All four taps use the same ratio, so</a:t>
+            </a:r>
+          </a:p>
+          <a:p>
+            <a:r>
+              <a:t>the top tap sets it: the full pack has to land inside the ADC range, which gives</a:t>
+            </a:r>
+          </a:p>
+          <a:p>
+            <a:r>
+              <a:t>0.128 and about 4.7 millivolts per count once it is referred back to the tap.</a:t>
+            </a:r>
+          </a:p>
+          <a:p>
+            <a:r>
+              <a:t>That is not precise enough for a production BMS, which is why I have noted an</a:t>
+            </a:r>
+          </a:p>
+          <a:p>
+            <a:r>
+              <a:t>external 16-bit converter as the upgrade path. On the right is the thermistor</a:t>
+            </a:r>
+          </a:p>
+          <a:p>
+            <a:r>
+              <a:t>input. The useful thing here is that a fixed calibration error cancels out when</a:t>
+            </a:r>
+          </a:p>
+          <a:p>
+            <a:r>
+              <a:t>you take a derivative, so the rate trip is far less sensitive to ADC error than</a:t>
+            </a:r>
+          </a:p>
+          <a:p>
+            <a:r>
+              <a:t>an absolute reading would be.</a:t>
             </a:r>
           </a:p>
         </p:txBody>
@@ -5923,7 +5832,7 @@
                 </a:solidFill>
                 <a:latin typeface="Times New Roman"/>
               </a:rPr>
-              <a:t>Sensing Circuits</a:t>
+              <a:t>Protection and Balancing</a:t>
             </a:r>
           </a:p>
         </p:txBody>
@@ -6032,9 +5941,68 @@
           </a:p>
         </p:txBody>
       </p:sp>
+      <p:sp>
+        <p:nvSpPr>
+          <p:cNvPr id="7" name="TextBox 6"/>
+          <p:cNvSpPr txBox="1"/>
+          <p:nvPr/>
+        </p:nvSpPr>
+        <p:spPr>
+          <a:xfrm>
+            <a:off x="1168603" y="1298448"/>
+            <a:ext cx="10195560" cy="914400"/>
+          </a:xfrm>
+          <a:prstGeom prst="rect">
+            <a:avLst/>
+          </a:prstGeom>
+          <a:noFill/>
+        </p:spPr>
+        <p:txBody>
+          <a:bodyPr wrap="square" lIns="0" rIns="0" tIns="0" bIns="0">
+            <a:noAutofit/>
+          </a:bodyPr>
+          <a:lstStyle/>
+          <a:p>
+            <a:pPr marL="283464" indent="-283464">
+              <a:spcAft>
+                <a:spcPts val="600"/>
+              </a:spcAft>
+              <a:buFont typeface="Arial"/>
+              <a:buChar char="•"/>
+            </a:pPr>
+            <a:r>
+              <a:rPr sz="1700" b="0" i="0" u="none">
+                <a:solidFill>
+                  <a:srgbClr val="000000"/>
+                </a:solidFill>
+                <a:latin typeface="Times New Roman"/>
+              </a:rPr>
+              <a:t>IRLZ44N: logic level, 55 V, about 22 mΩ on-resistance at a 5 V gate</a:t>
+            </a:r>
+          </a:p>
+          <a:p>
+            <a:pPr marL="283464" indent="-283464">
+              <a:spcAft>
+                <a:spcPts val="600"/>
+              </a:spcAft>
+              <a:buFont typeface="Arial"/>
+              <a:buChar char="•"/>
+            </a:pPr>
+            <a:r>
+              <a:rPr sz="1700" b="0" i="0" u="none">
+                <a:solidFill>
+                  <a:srgbClr val="000000"/>
+                </a:solidFill>
+                <a:latin typeface="Times New Roman"/>
+              </a:rPr>
+              <a:t>The two body diodes face opposite ways, so each direction blocks separately</a:t>
+            </a:r>
+          </a:p>
+        </p:txBody>
+      </p:sp>
       <p:pic>
         <p:nvPicPr>
-          <p:cNvPr id="7" name="Picture 6" descr="04_voltage_sense_schematic.png"/>
+          <p:cNvPr id="8" name="Picture 7" descr="06_cutoff_balancing_schematic.png"/>
           <p:cNvPicPr>
             <a:picLocks noChangeAspect="1"/>
           </p:cNvPicPr>
@@ -6048,167 +6016,14 @@
         </p:blipFill>
         <p:spPr>
           <a:xfrm>
-            <a:off x="658368" y="1769728"/>
-            <a:ext cx="5230368" cy="2815622"/>
+            <a:off x="1468954" y="2267712"/>
+            <a:ext cx="9251042" cy="3858768"/>
           </a:xfrm>
           <a:prstGeom prst="rect">
             <a:avLst/>
           </a:prstGeom>
         </p:spPr>
       </p:pic>
-      <p:sp>
-        <p:nvSpPr>
-          <p:cNvPr id="8" name="TextBox 7"/>
-          <p:cNvSpPr txBox="1"/>
-          <p:nvPr/>
-        </p:nvSpPr>
-        <p:spPr>
-          <a:xfrm>
-            <a:off x="658368" y="1243584"/>
-            <a:ext cx="5230368" cy="310896"/>
-          </a:xfrm>
-          <a:prstGeom prst="rect">
-            <a:avLst/>
-          </a:prstGeom>
-          <a:noFill/>
-        </p:spPr>
-        <p:txBody>
-          <a:bodyPr wrap="square" lIns="0" rIns="0" tIns="0" bIns="0">
-            <a:noAutofit/>
-          </a:bodyPr>
-          <a:lstStyle/>
-          <a:p>
-            <a:pPr algn="ctr"/>
-            <a:r>
-              <a:rPr sz="1600" b="1" i="0" u="none">
-                <a:solidFill>
-                  <a:srgbClr val="000000"/>
-                </a:solidFill>
-                <a:latin typeface="Times New Roman"/>
-              </a:rPr>
-              <a:t>Cell voltage</a:t>
-            </a:r>
-          </a:p>
-        </p:txBody>
-      </p:sp>
-      <p:pic>
-        <p:nvPicPr>
-          <p:cNvPr id="9" name="Picture 8" descr="05_ntc_schematic.png"/>
-          <p:cNvPicPr>
-            <a:picLocks noChangeAspect="1"/>
-          </p:cNvPicPr>
-          <p:nvPr/>
-        </p:nvPicPr>
-        <p:blipFill>
-          <a:blip r:embed="rId4"/>
-          <a:stretch>
-            <a:fillRect/>
-          </a:stretch>
-        </p:blipFill>
-        <p:spPr>
-          <a:xfrm>
-            <a:off x="6300216" y="1970349"/>
-            <a:ext cx="5230368" cy="2414381"/>
-          </a:xfrm>
-          <a:prstGeom prst="rect">
-            <a:avLst/>
-          </a:prstGeom>
-        </p:spPr>
-      </p:pic>
-      <p:sp>
-        <p:nvSpPr>
-          <p:cNvPr id="10" name="TextBox 9"/>
-          <p:cNvSpPr txBox="1"/>
-          <p:nvPr/>
-        </p:nvSpPr>
-        <p:spPr>
-          <a:xfrm>
-            <a:off x="6300216" y="1243584"/>
-            <a:ext cx="5230368" cy="310896"/>
-          </a:xfrm>
-          <a:prstGeom prst="rect">
-            <a:avLst/>
-          </a:prstGeom>
-          <a:noFill/>
-        </p:spPr>
-        <p:txBody>
-          <a:bodyPr wrap="square" lIns="0" rIns="0" tIns="0" bIns="0">
-            <a:noAutofit/>
-          </a:bodyPr>
-          <a:lstStyle/>
-          <a:p>
-            <a:pPr algn="ctr"/>
-            <a:r>
-              <a:rPr sz="1600" b="1" i="0" u="none">
-                <a:solidFill>
-                  <a:srgbClr val="000000"/>
-                </a:solidFill>
-                <a:latin typeface="Times New Roman"/>
-              </a:rPr>
-              <a:t>Cell temperature</a:t>
-            </a:r>
-          </a:p>
-        </p:txBody>
-      </p:sp>
-      <p:sp>
-        <p:nvSpPr>
-          <p:cNvPr id="11" name="TextBox 10"/>
-          <p:cNvSpPr txBox="1"/>
-          <p:nvPr/>
-        </p:nvSpPr>
-        <p:spPr>
-          <a:xfrm>
-            <a:off x="1168603" y="4928616"/>
-            <a:ext cx="10195560" cy="1216152"/>
-          </a:xfrm>
-          <a:prstGeom prst="rect">
-            <a:avLst/>
-          </a:prstGeom>
-          <a:noFill/>
-        </p:spPr>
-        <p:txBody>
-          <a:bodyPr wrap="square" lIns="0" rIns="0" tIns="0" bIns="0">
-            <a:noAutofit/>
-          </a:bodyPr>
-          <a:lstStyle/>
-          <a:p>
-            <a:pPr marL="283464" indent="-283464">
-              <a:spcAft>
-                <a:spcPts val="800"/>
-              </a:spcAft>
-              <a:buFont typeface="Arial"/>
-              <a:buChar char="•"/>
-            </a:pPr>
-            <a:r>
-              <a:rPr sz="1700" b="0" i="0" u="none">
-                <a:solidFill>
-                  <a:srgbClr val="000000"/>
-                </a:solidFill>
-                <a:latin typeface="Times New Roman"/>
-              </a:rPr>
-              <a:t>Divider ratio 0.128 puts a full 16.8 V pack at 2.15 V — about 4.7 mV per count</a:t>
-            </a:r>
-          </a:p>
-          <a:p>
-            <a:pPr marL="283464" indent="-283464">
-              <a:spcAft>
-                <a:spcPts val="800"/>
-              </a:spcAft>
-              <a:buFont typeface="Arial"/>
-              <a:buChar char="•"/>
-            </a:pPr>
-            <a:r>
-              <a:rPr sz="1700" b="0" i="0" u="none">
-                <a:solidFill>
-                  <a:srgbClr val="000000"/>
-                </a:solidFill>
-                <a:latin typeface="Times New Roman"/>
-              </a:rPr>
-              <a:t>Beta equation: 1/T = 1/T₀ + (1/β)·ln(R/R₀), with T₀ = 298.15 K, R₀ = 10 kΩ, β = 3950 K</a:t>
-            </a:r>
-          </a:p>
-        </p:txBody>
-      </p:sp>
     </p:spTree>
   </p:cSld>
   <p:clrMapOvr>
@@ -6281,7 +6096,7 @@
                 </a:solidFill>
                 <a:latin typeface="Times New Roman"/>
               </a:rPr>
-              <a:t>Protection and Balancing</a:t>
+              <a:t>Firmware Architecture</a:t>
             </a:r>
           </a:p>
         </p:txBody>
@@ -6390,68 +6205,9 @@
           </a:p>
         </p:txBody>
       </p:sp>
-      <p:sp>
-        <p:nvSpPr>
-          <p:cNvPr id="7" name="TextBox 6"/>
-          <p:cNvSpPr txBox="1"/>
-          <p:nvPr/>
-        </p:nvSpPr>
-        <p:spPr>
-          <a:xfrm>
-            <a:off x="1168603" y="1298448"/>
-            <a:ext cx="10195560" cy="914400"/>
-          </a:xfrm>
-          <a:prstGeom prst="rect">
-            <a:avLst/>
-          </a:prstGeom>
-          <a:noFill/>
-        </p:spPr>
-        <p:txBody>
-          <a:bodyPr wrap="square" lIns="0" rIns="0" tIns="0" bIns="0">
-            <a:noAutofit/>
-          </a:bodyPr>
-          <a:lstStyle/>
-          <a:p>
-            <a:pPr marL="283464" indent="-283464">
-              <a:spcAft>
-                <a:spcPts val="600"/>
-              </a:spcAft>
-              <a:buFont typeface="Arial"/>
-              <a:buChar char="•"/>
-            </a:pPr>
-            <a:r>
-              <a:rPr sz="1700" b="0" i="0" u="none">
-                <a:solidFill>
-                  <a:srgbClr val="000000"/>
-                </a:solidFill>
-                <a:latin typeface="Times New Roman"/>
-              </a:rPr>
-              <a:t>IRLZ44N: logic level, 55 V, about 22 mΩ on-resistance at a 5 V gate</a:t>
-            </a:r>
-          </a:p>
-          <a:p>
-            <a:pPr marL="283464" indent="-283464">
-              <a:spcAft>
-                <a:spcPts val="600"/>
-              </a:spcAft>
-              <a:buFont typeface="Arial"/>
-              <a:buChar char="•"/>
-            </a:pPr>
-            <a:r>
-              <a:rPr sz="1700" b="0" i="0" u="none">
-                <a:solidFill>
-                  <a:srgbClr val="000000"/>
-                </a:solidFill>
-                <a:latin typeface="Times New Roman"/>
-              </a:rPr>
-              <a:t>The two body diodes face opposite ways, so each direction blocks separately</a:t>
-            </a:r>
-          </a:p>
-        </p:txBody>
-      </p:sp>
       <p:pic>
         <p:nvPicPr>
-          <p:cNvPr id="8" name="Picture 7" descr="06_cutoff_balancing_schematic.png"/>
+          <p:cNvPr id="7" name="Picture 6" descr="07_firmware_flowchart.png"/>
           <p:cNvPicPr>
             <a:picLocks noChangeAspect="1"/>
           </p:cNvPicPr>
@@ -6465,8 +6221,8 @@
         </p:blipFill>
         <p:spPr>
           <a:xfrm>
-            <a:off x="1468954" y="2267712"/>
-            <a:ext cx="9251042" cy="3858768"/>
+            <a:off x="889480" y="1298448"/>
+            <a:ext cx="10409990" cy="4828032"/>
           </a:xfrm>
           <a:prstGeom prst="rect">
             <a:avLst/>
@@ -6545,7 +6301,7 @@
                 </a:solidFill>
                 <a:latin typeface="Times New Roman"/>
               </a:rPr>
-              <a:t>Firmware Architecture</a:t>
+              <a:t>The Predictive Algorithm</a:t>
             </a:r>
           </a:p>
         </p:txBody>
@@ -6654,30 +6410,324 @@
           </a:p>
         </p:txBody>
       </p:sp>
-      <p:pic>
-        <p:nvPicPr>
-          <p:cNvPr id="7" name="Picture 6" descr="07_firmware_flowchart.png"/>
-          <p:cNvPicPr>
-            <a:picLocks noChangeAspect="1"/>
-          </p:cNvPicPr>
+      <p:sp>
+        <p:nvSpPr>
+          <p:cNvPr id="7" name="TextBox 6"/>
+          <p:cNvSpPr txBox="1"/>
           <p:nvPr/>
-        </p:nvPicPr>
-        <p:blipFill>
-          <a:blip r:embed="rId3"/>
-          <a:stretch>
-            <a:fillRect/>
-          </a:stretch>
-        </p:blipFill>
-        <p:spPr>
-          <a:xfrm>
-            <a:off x="889480" y="1298448"/>
-            <a:ext cx="10409990" cy="4828032"/>
-          </a:xfrm>
-          <a:prstGeom prst="rect">
-            <a:avLst/>
-          </a:prstGeom>
-        </p:spPr>
-      </p:pic>
+        </p:nvSpPr>
+        <p:spPr>
+          <a:xfrm>
+            <a:off x="1168603" y="1389888"/>
+            <a:ext cx="10195560" cy="777240"/>
+          </a:xfrm>
+          <a:prstGeom prst="rect">
+            <a:avLst/>
+          </a:prstGeom>
+          <a:noFill/>
+        </p:spPr>
+        <p:txBody>
+          <a:bodyPr wrap="square" lIns="0" rIns="0" tIns="0" bIns="0">
+            <a:noAutofit/>
+          </a:bodyPr>
+          <a:lstStyle/>
+          <a:p>
+            <a:pPr marL="283464" indent="-283464">
+              <a:spcAft>
+                <a:spcPts val="600"/>
+              </a:spcAft>
+              <a:buFont typeface="Arial"/>
+              <a:buChar char="•"/>
+            </a:pPr>
+            <a:r>
+              <a:rPr sz="1700" b="0" i="0" u="none">
+                <a:solidFill>
+                  <a:srgbClr val="000000"/>
+                </a:solidFill>
+                <a:latin typeface="Times New Roman"/>
+              </a:rPr>
+              <a:t>Temperature is sampled every 100 ms and smoothed before the slope is taken</a:t>
+            </a:r>
+          </a:p>
+          <a:p>
+            <a:pPr marL="283464" indent="-283464">
+              <a:spcAft>
+                <a:spcPts val="600"/>
+              </a:spcAft>
+              <a:buFont typeface="Arial"/>
+              <a:buChar char="•"/>
+            </a:pPr>
+            <a:r>
+              <a:rPr sz="1700" b="0" i="0" u="none">
+                <a:solidFill>
+                  <a:srgbClr val="000000"/>
+                </a:solidFill>
+                <a:latin typeface="Times New Roman"/>
+              </a:rPr>
+              <a:t>The slope is an exponential moving average over a one-second window</a:t>
+            </a:r>
+          </a:p>
+        </p:txBody>
+      </p:sp>
+      <p:sp>
+        <p:nvSpPr>
+          <p:cNvPr id="8" name="TextBox 7"/>
+          <p:cNvSpPr txBox="1"/>
+          <p:nvPr/>
+        </p:nvSpPr>
+        <p:spPr>
+          <a:xfrm>
+            <a:off x="1671523" y="2395728"/>
+            <a:ext cx="9189720" cy="2714243"/>
+          </a:xfrm>
+          <a:prstGeom prst="rect">
+            <a:avLst/>
+          </a:prstGeom>
+          <a:solidFill>
+            <a:srgbClr val="F5F5F5"/>
+          </a:solidFill>
+          <a:ln>
+            <a:solidFill>
+              <a:srgbClr val="D8D8D8"/>
+            </a:solidFill>
+          </a:ln>
+        </p:spPr>
+        <p:txBody>
+          <a:bodyPr wrap="none" lIns="146304" rIns="146304" tIns="91440" bIns="91440">
+            <a:noAutofit/>
+          </a:bodyPr>
+          <a:lstStyle/>
+          <a:p>
+            <a:pPr>
+              <a:spcAft>
+                <a:spcPts val="0"/>
+              </a:spcAft>
+              <a:buNone/>
+            </a:pPr>
+            <a:r>
+              <a:rPr sz="1500" b="0" i="0" u="none">
+                <a:solidFill>
+                  <a:srgbClr val="000000"/>
+                </a:solidFill>
+                <a:latin typeface="Consolas"/>
+              </a:rPr>
+              <a:t>T_filt  = ema(T_raw, alpha = 0.2)</a:t>
+            </a:r>
+          </a:p>
+          <a:p>
+            <a:pPr>
+              <a:spcAft>
+                <a:spcPts val="0"/>
+              </a:spcAft>
+              <a:buNone/>
+            </a:pPr>
+            <a:r>
+              <a:rPr sz="1500" b="0" i="0" u="none">
+                <a:solidFill>
+                  <a:srgbClr val="000000"/>
+                </a:solidFill>
+                <a:latin typeface="Consolas"/>
+              </a:rPr>
+              <a:t>slope   = (T_filt - T_filt_1s_ago) / 1.0</a:t>
+            </a:r>
+          </a:p>
+          <a:p>
+            <a:pPr>
+              <a:spcAft>
+                <a:spcPts val="0"/>
+              </a:spcAft>
+              <a:buNone/>
+            </a:pPr>
+            <a:r>
+              <a:rPr sz="1500" b="0" i="0" u="none">
+                <a:solidFill>
+                  <a:srgbClr val="000000"/>
+                </a:solidFill>
+                <a:latin typeface="Consolas"/>
+              </a:rPr>
+              <a:t>dTdt    = ema(slope, alpha = 0.3)</a:t>
+            </a:r>
+          </a:p>
+          <a:p>
+            <a:pPr>
+              <a:spcAft>
+                <a:spcPts val="0"/>
+              </a:spcAft>
+              <a:buNone/>
+            </a:pPr>
+            <a:r>
+              <a:rPr sz="1500" b="0" i="0" u="none">
+                <a:solidFill>
+                  <a:srgbClr val="000000"/>
+                </a:solidFill>
+                <a:latin typeface="Consolas"/>
+              </a:rPr>
+              <a:t/>
+            </a:r>
+          </a:p>
+          <a:p>
+            <a:pPr>
+              <a:spcAft>
+                <a:spcPts val="0"/>
+              </a:spcAft>
+              <a:buNone/>
+            </a:pPr>
+            <a:r>
+              <a:rPr sz="1500" b="0" i="0" u="none">
+                <a:solidFill>
+                  <a:srgbClr val="000000"/>
+                </a:solidFill>
+                <a:latin typeface="Consolas"/>
+              </a:rPr>
+              <a:t>if dTdt &gt;= 1.0 or T_filt &gt;= 60.0:</a:t>
+            </a:r>
+          </a:p>
+          <a:p>
+            <a:pPr>
+              <a:spcAft>
+                <a:spcPts val="0"/>
+              </a:spcAft>
+              <a:buNone/>
+            </a:pPr>
+            <a:r>
+              <a:rPr sz="1500" b="0" i="0" u="none">
+                <a:solidFill>
+                  <a:srgbClr val="000000"/>
+                </a:solidFill>
+                <a:latin typeface="Consolas"/>
+              </a:rPr>
+              <a:t>    open_both_mosfets()</a:t>
+            </a:r>
+          </a:p>
+          <a:p>
+            <a:pPr>
+              <a:spcAft>
+                <a:spcPts val="0"/>
+              </a:spcAft>
+              <a:buNone/>
+            </a:pPr>
+            <a:r>
+              <a:rPr sz="1500" b="0" i="0" u="none">
+                <a:solidFill>
+                  <a:srgbClr val="000000"/>
+                </a:solidFill>
+                <a:latin typeface="Consolas"/>
+              </a:rPr>
+              <a:t>    state = CUTOFF</a:t>
+            </a:r>
+          </a:p>
+          <a:p>
+            <a:pPr>
+              <a:spcAft>
+                <a:spcPts val="0"/>
+              </a:spcAft>
+              <a:buNone/>
+            </a:pPr>
+            <a:r>
+              <a:rPr sz="1500" b="0" i="0" u="none">
+                <a:solidFill>
+                  <a:srgbClr val="000000"/>
+                </a:solidFill>
+                <a:latin typeface="Consolas"/>
+              </a:rPr>
+              <a:t>elif dTdt &gt;= 0.5:</a:t>
+            </a:r>
+          </a:p>
+          <a:p>
+            <a:pPr>
+              <a:spcAft>
+                <a:spcPts val="0"/>
+              </a:spcAft>
+              <a:buNone/>
+            </a:pPr>
+            <a:r>
+              <a:rPr sz="1500" b="0" i="0" u="none">
+                <a:solidFill>
+                  <a:srgbClr val="000000"/>
+                </a:solidFill>
+                <a:latin typeface="Consolas"/>
+              </a:rPr>
+              <a:t>    state = WARNING</a:t>
+            </a:r>
+          </a:p>
+          <a:p>
+            <a:pPr>
+              <a:spcAft>
+                <a:spcPts val="0"/>
+              </a:spcAft>
+              <a:buNone/>
+            </a:pPr>
+            <a:r>
+              <a:rPr sz="1500" b="0" i="0" u="none">
+                <a:solidFill>
+                  <a:srgbClr val="000000"/>
+                </a:solidFill>
+                <a:latin typeface="Consolas"/>
+              </a:rPr>
+              <a:t># leave CUTOFF only when dTdt &lt; 0.2 and T_filt &lt; 40 for 5 s</a:t>
+            </a:r>
+          </a:p>
+        </p:txBody>
+      </p:sp>
+      <p:sp>
+        <p:nvSpPr>
+          <p:cNvPr id="9" name="TextBox 8"/>
+          <p:cNvSpPr txBox="1"/>
+          <p:nvPr/>
+        </p:nvSpPr>
+        <p:spPr>
+          <a:xfrm>
+            <a:off x="1168603" y="5384291"/>
+            <a:ext cx="10195560" cy="760476"/>
+          </a:xfrm>
+          <a:prstGeom prst="rect">
+            <a:avLst/>
+          </a:prstGeom>
+          <a:noFill/>
+        </p:spPr>
+        <p:txBody>
+          <a:bodyPr wrap="square" lIns="0" rIns="0" tIns="0" bIns="0">
+            <a:noAutofit/>
+          </a:bodyPr>
+          <a:lstStyle/>
+          <a:p>
+            <a:pPr marL="283464" indent="-283464">
+              <a:spcAft>
+                <a:spcPts val="800"/>
+              </a:spcAft>
+              <a:buFont typeface="Arial"/>
+              <a:buChar char="•"/>
+            </a:pPr>
+            <a:r>
+              <a:rPr sz="1700" b="0" i="0" u="none">
+                <a:solidFill>
+                  <a:srgbClr val="000000"/>
+                </a:solidFill>
+                <a:latin typeface="Times New Roman"/>
+              </a:rPr>
+              <a:t>Smoothing comes first: a slope taken from raw counts is mostly noise</a:t>
+            </a:r>
+          </a:p>
+          <a:p>
+            <a:pPr marL="283464" indent="-283464">
+              <a:spcAft>
+                <a:spcPts val="800"/>
+              </a:spcAft>
+              <a:buFont typeface="Arial"/>
+              <a:buChar char="•"/>
+            </a:pPr>
+            <a:r>
+              <a:rPr sz="1700" b="0" i="0" u="none">
+                <a:solidFill>
+                  <a:srgbClr val="000000"/>
+                </a:solidFill>
+                <a:latin typeface="Times New Roman"/>
+              </a:rPr>
+              <a:t>A fixed calibration error cancels in a slope, so the trip tolerates ADC drift</a:t>
+            </a:r>
+          </a:p>
+        </p:txBody>
+      </p:sp>
     </p:spTree>
   </p:cSld>
   <p:clrMapOvr>
@@ -6750,7 +6800,7 @@
                 </a:solidFill>
                 <a:latin typeface="Times New Roman"/>
               </a:rPr>
-              <a:t>The Predictive Algorithm</a:t>
+              <a:t>Predictive Compared With a Fixed Limit</a:t>
             </a:r>
           </a:p>
         </p:txBody>
@@ -6859,16 +6909,40 @@
           </a:p>
         </p:txBody>
       </p:sp>
-      <p:sp>
-        <p:nvSpPr>
-          <p:cNvPr id="7" name="TextBox 6"/>
+      <p:pic>
+        <p:nvPicPr>
+          <p:cNvPr id="7" name="Picture 6" descr="08_predictive_vs_reactive.png"/>
+          <p:cNvPicPr>
+            <a:picLocks noChangeAspect="1"/>
+          </p:cNvPicPr>
+          <p:nvPr/>
+        </p:nvPicPr>
+        <p:blipFill>
+          <a:blip r:embed="rId3"/>
+          <a:stretch>
+            <a:fillRect/>
+          </a:stretch>
+        </p:blipFill>
+        <p:spPr>
+          <a:xfrm>
+            <a:off x="1626599" y="1298448"/>
+            <a:ext cx="8935752" cy="4443984"/>
+          </a:xfrm>
+          <a:prstGeom prst="rect">
+            <a:avLst/>
+          </a:prstGeom>
+        </p:spPr>
+      </p:pic>
+      <p:sp>
+        <p:nvSpPr>
+          <p:cNvPr id="8" name="TextBox 7"/>
           <p:cNvSpPr txBox="1"/>
           <p:nvPr/>
         </p:nvSpPr>
         <p:spPr>
           <a:xfrm>
-            <a:off x="1168603" y="1389888"/>
-            <a:ext cx="10195560" cy="777240"/>
+            <a:off x="1168603" y="5797296"/>
+            <a:ext cx="10195560" cy="310896"/>
           </a:xfrm>
           <a:prstGeom prst="rect">
             <a:avLst/>
@@ -6881,298 +6955,15 @@
           </a:bodyPr>
           <a:lstStyle/>
           <a:p>
-            <a:pPr marL="283464" indent="-283464">
-              <a:spcAft>
-                <a:spcPts val="600"/>
-              </a:spcAft>
-              <a:buFont typeface="Arial"/>
-              <a:buChar char="•"/>
-            </a:pPr>
-            <a:r>
-              <a:rPr sz="1700" b="0" i="0" u="none">
-                <a:solidFill>
-                  <a:srgbClr val="000000"/>
+            <a:pPr algn="ctr"/>
+            <a:r>
+              <a:rPr sz="1400" b="0" i="1" u="none">
+                <a:solidFill>
+                  <a:srgbClr val="898989"/>
                 </a:solidFill>
                 <a:latin typeface="Times New Roman"/>
               </a:rPr>
-              <a:t>Temperature is sampled every 100 ms and smoothed before the slope is taken</a:t>
-            </a:r>
-          </a:p>
-          <a:p>
-            <a:pPr marL="283464" indent="-283464">
-              <a:spcAft>
-                <a:spcPts val="600"/>
-              </a:spcAft>
-              <a:buFont typeface="Arial"/>
-              <a:buChar char="•"/>
-            </a:pPr>
-            <a:r>
-              <a:rPr sz="1700" b="0" i="0" u="none">
-                <a:solidFill>
-                  <a:srgbClr val="000000"/>
-                </a:solidFill>
-                <a:latin typeface="Times New Roman"/>
-              </a:rPr>
-              <a:t>The slope is an exponential moving average over a one-second window</a:t>
-            </a:r>
-          </a:p>
-        </p:txBody>
-      </p:sp>
-      <p:sp>
-        <p:nvSpPr>
-          <p:cNvPr id="8" name="TextBox 7"/>
-          <p:cNvSpPr txBox="1"/>
-          <p:nvPr/>
-        </p:nvSpPr>
-        <p:spPr>
-          <a:xfrm>
-            <a:off x="1671523" y="2395728"/>
-            <a:ext cx="9189720" cy="2714243"/>
-          </a:xfrm>
-          <a:prstGeom prst="rect">
-            <a:avLst/>
-          </a:prstGeom>
-          <a:solidFill>
-            <a:srgbClr val="F5F5F5"/>
-          </a:solidFill>
-          <a:ln>
-            <a:solidFill>
-              <a:srgbClr val="D8D8D8"/>
-            </a:solidFill>
-          </a:ln>
-        </p:spPr>
-        <p:txBody>
-          <a:bodyPr wrap="none" lIns="146304" rIns="146304" tIns="91440" bIns="91440">
-            <a:noAutofit/>
-          </a:bodyPr>
-          <a:lstStyle/>
-          <a:p>
-            <a:pPr>
-              <a:spcAft>
-                <a:spcPts val="0"/>
-              </a:spcAft>
-              <a:buNone/>
-            </a:pPr>
-            <a:r>
-              <a:rPr sz="1500" b="0" i="0" u="none">
-                <a:solidFill>
-                  <a:srgbClr val="000000"/>
-                </a:solidFill>
-                <a:latin typeface="Consolas"/>
-              </a:rPr>
-              <a:t>T_filt  = ema(T_raw, alpha = 0.2)</a:t>
-            </a:r>
-          </a:p>
-          <a:p>
-            <a:pPr>
-              <a:spcAft>
-                <a:spcPts val="0"/>
-              </a:spcAft>
-              <a:buNone/>
-            </a:pPr>
-            <a:r>
-              <a:rPr sz="1500" b="0" i="0" u="none">
-                <a:solidFill>
-                  <a:srgbClr val="000000"/>
-                </a:solidFill>
-                <a:latin typeface="Consolas"/>
-              </a:rPr>
-              <a:t>slope   = (T_filt - T_filt_1s_ago) / 1.0</a:t>
-            </a:r>
-          </a:p>
-          <a:p>
-            <a:pPr>
-              <a:spcAft>
-                <a:spcPts val="0"/>
-              </a:spcAft>
-              <a:buNone/>
-            </a:pPr>
-            <a:r>
-              <a:rPr sz="1500" b="0" i="0" u="none">
-                <a:solidFill>
-                  <a:srgbClr val="000000"/>
-                </a:solidFill>
-                <a:latin typeface="Consolas"/>
-              </a:rPr>
-              <a:t>dTdt    = ema(slope, alpha = 0.3)</a:t>
-            </a:r>
-          </a:p>
-          <a:p>
-            <a:pPr>
-              <a:spcAft>
-                <a:spcPts val="0"/>
-              </a:spcAft>
-              <a:buNone/>
-            </a:pPr>
-            <a:r>
-              <a:rPr sz="1500" b="0" i="0" u="none">
-                <a:solidFill>
-                  <a:srgbClr val="000000"/>
-                </a:solidFill>
-                <a:latin typeface="Consolas"/>
-              </a:rPr>
-              <a:t/>
-            </a:r>
-          </a:p>
-          <a:p>
-            <a:pPr>
-              <a:spcAft>
-                <a:spcPts val="0"/>
-              </a:spcAft>
-              <a:buNone/>
-            </a:pPr>
-            <a:r>
-              <a:rPr sz="1500" b="0" i="0" u="none">
-                <a:solidFill>
-                  <a:srgbClr val="000000"/>
-                </a:solidFill>
-                <a:latin typeface="Consolas"/>
-              </a:rPr>
-              <a:t>if dTdt &gt;= 1.0 or T_filt &gt;= 60.0:</a:t>
-            </a:r>
-          </a:p>
-          <a:p>
-            <a:pPr>
-              <a:spcAft>
-                <a:spcPts val="0"/>
-              </a:spcAft>
-              <a:buNone/>
-            </a:pPr>
-            <a:r>
-              <a:rPr sz="1500" b="0" i="0" u="none">
-                <a:solidFill>
-                  <a:srgbClr val="000000"/>
-                </a:solidFill>
-                <a:latin typeface="Consolas"/>
-              </a:rPr>
-              <a:t>    open_both_mosfets()</a:t>
-            </a:r>
-          </a:p>
-          <a:p>
-            <a:pPr>
-              <a:spcAft>
-                <a:spcPts val="0"/>
-              </a:spcAft>
-              <a:buNone/>
-            </a:pPr>
-            <a:r>
-              <a:rPr sz="1500" b="0" i="0" u="none">
-                <a:solidFill>
-                  <a:srgbClr val="000000"/>
-                </a:solidFill>
-                <a:latin typeface="Consolas"/>
-              </a:rPr>
-              <a:t>    state = CUTOFF</a:t>
-            </a:r>
-          </a:p>
-          <a:p>
-            <a:pPr>
-              <a:spcAft>
-                <a:spcPts val="0"/>
-              </a:spcAft>
-              <a:buNone/>
-            </a:pPr>
-            <a:r>
-              <a:rPr sz="1500" b="0" i="0" u="none">
-                <a:solidFill>
-                  <a:srgbClr val="000000"/>
-                </a:solidFill>
-                <a:latin typeface="Consolas"/>
-              </a:rPr>
-              <a:t>elif dTdt &gt;= 0.5:</a:t>
-            </a:r>
-          </a:p>
-          <a:p>
-            <a:pPr>
-              <a:spcAft>
-                <a:spcPts val="0"/>
-              </a:spcAft>
-              <a:buNone/>
-            </a:pPr>
-            <a:r>
-              <a:rPr sz="1500" b="0" i="0" u="none">
-                <a:solidFill>
-                  <a:srgbClr val="000000"/>
-                </a:solidFill>
-                <a:latin typeface="Consolas"/>
-              </a:rPr>
-              <a:t>    state = WARNING</a:t>
-            </a:r>
-          </a:p>
-          <a:p>
-            <a:pPr>
-              <a:spcAft>
-                <a:spcPts val="0"/>
-              </a:spcAft>
-              <a:buNone/>
-            </a:pPr>
-            <a:r>
-              <a:rPr sz="1500" b="0" i="0" u="none">
-                <a:solidFill>
-                  <a:srgbClr val="000000"/>
-                </a:solidFill>
-                <a:latin typeface="Consolas"/>
-              </a:rPr>
-              <a:t># leave CUTOFF only when dTdt &lt; 0.2 and T_filt &lt; 40 for 5 s</a:t>
-            </a:r>
-          </a:p>
-        </p:txBody>
-      </p:sp>
-      <p:sp>
-        <p:nvSpPr>
-          <p:cNvPr id="9" name="TextBox 8"/>
-          <p:cNvSpPr txBox="1"/>
-          <p:nvPr/>
-        </p:nvSpPr>
-        <p:spPr>
-          <a:xfrm>
-            <a:off x="1168603" y="5384291"/>
-            <a:ext cx="10195560" cy="760476"/>
-          </a:xfrm>
-          <a:prstGeom prst="rect">
-            <a:avLst/>
-          </a:prstGeom>
-          <a:noFill/>
-        </p:spPr>
-        <p:txBody>
-          <a:bodyPr wrap="square" lIns="0" rIns="0" tIns="0" bIns="0">
-            <a:noAutofit/>
-          </a:bodyPr>
-          <a:lstStyle/>
-          <a:p>
-            <a:pPr marL="283464" indent="-283464">
-              <a:spcAft>
-                <a:spcPts val="800"/>
-              </a:spcAft>
-              <a:buFont typeface="Arial"/>
-              <a:buChar char="•"/>
-            </a:pPr>
-            <a:r>
-              <a:rPr sz="1700" b="0" i="0" u="none">
-                <a:solidFill>
-                  <a:srgbClr val="000000"/>
-                </a:solidFill>
-                <a:latin typeface="Times New Roman"/>
-              </a:rPr>
-              <a:t>Smoothing comes first: a slope taken from raw counts is mostly noise</a:t>
-            </a:r>
-          </a:p>
-          <a:p>
-            <a:pPr marL="283464" indent="-283464">
-              <a:spcAft>
-                <a:spcPts val="800"/>
-              </a:spcAft>
-              <a:buFont typeface="Arial"/>
-              <a:buChar char="•"/>
-            </a:pPr>
-            <a:r>
-              <a:rPr sz="1700" b="0" i="0" u="none">
-                <a:solidFill>
-                  <a:srgbClr val="000000"/>
-                </a:solidFill>
-                <a:latin typeface="Times New Roman"/>
-              </a:rPr>
-              <a:t>A fixed calibration error cancels in a slope, so the trip tolerates ADC drift</a:t>
+              <a:t>Simulated for illustration. Real measurements will replace this after bench testing.</a:t>
             </a:r>
           </a:p>
         </p:txBody>
@@ -7249,7 +7040,7 @@
                 </a:solidFill>
                 <a:latin typeface="Times New Roman"/>
               </a:rPr>
-              <a:t>Predictive Compared With a Fixed Limit</a:t>
+              <a:t>IoT Dashboard</a:t>
             </a:r>
           </a:p>
         </p:txBody>
@@ -7360,7 +7151,7 @@
       </p:sp>
       <p:pic>
         <p:nvPicPr>
-          <p:cNvPr id="7" name="Picture 6" descr="08_predictive_vs_reactive.png"/>
+          <p:cNvPr id="7" name="Picture 6" descr="09_iot_architecture.png"/>
           <p:cNvPicPr>
             <a:picLocks noChangeAspect="1"/>
           </p:cNvPicPr>
@@ -7374,49 +7165,14 @@
         </p:blipFill>
         <p:spPr>
           <a:xfrm>
-            <a:off x="1626599" y="1298448"/>
-            <a:ext cx="8935752" cy="4443984"/>
+            <a:off x="658368" y="1381810"/>
+            <a:ext cx="10872215" cy="4661306"/>
           </a:xfrm>
           <a:prstGeom prst="rect">
             <a:avLst/>
           </a:prstGeom>
         </p:spPr>
       </p:pic>
-      <p:sp>
-        <p:nvSpPr>
-          <p:cNvPr id="8" name="TextBox 7"/>
-          <p:cNvSpPr txBox="1"/>
-          <p:nvPr/>
-        </p:nvSpPr>
-        <p:spPr>
-          <a:xfrm>
-            <a:off x="1168603" y="5797296"/>
-            <a:ext cx="10195560" cy="310896"/>
-          </a:xfrm>
-          <a:prstGeom prst="rect">
-            <a:avLst/>
-          </a:prstGeom>
-          <a:noFill/>
-        </p:spPr>
-        <p:txBody>
-          <a:bodyPr wrap="square" lIns="0" rIns="0" tIns="0" bIns="0">
-            <a:noAutofit/>
-          </a:bodyPr>
-          <a:lstStyle/>
-          <a:p>
-            <a:pPr algn="ctr"/>
-            <a:r>
-              <a:rPr sz="1400" b="0" i="1" u="none">
-                <a:solidFill>
-                  <a:srgbClr val="898989"/>
-                </a:solidFill>
-                <a:latin typeface="Times New Roman"/>
-              </a:rPr>
-              <a:t>Simulated for illustration. Real measurements will replace this after bench testing.</a:t>
-            </a:r>
-          </a:p>
-        </p:txBody>
-      </p:sp>
     </p:spTree>
   </p:cSld>
   <p:clrMapOvr>
@@ -7489,7 +7245,7 @@
                 </a:solidFill>
                 <a:latin typeface="Times New Roman"/>
               </a:rPr>
-              <a:t>IoT Dashboard</a:t>
+              <a:t>Bill of Materials</a:t>
             </a:r>
           </a:p>
         </p:txBody>
@@ -7594,211 +7350,6 @@
                 <a:latin typeface="Calibri"/>
               </a:rPr>
               <a:t>15</a:t>
-            </a:r>
-          </a:p>
-        </p:txBody>
-      </p:sp>
-      <p:pic>
-        <p:nvPicPr>
-          <p:cNvPr id="7" name="Picture 6" descr="09_iot_architecture.png"/>
-          <p:cNvPicPr>
-            <a:picLocks noChangeAspect="1"/>
-          </p:cNvPicPr>
-          <p:nvPr/>
-        </p:nvPicPr>
-        <p:blipFill>
-          <a:blip r:embed="rId3"/>
-          <a:stretch>
-            <a:fillRect/>
-          </a:stretch>
-        </p:blipFill>
-        <p:spPr>
-          <a:xfrm>
-            <a:off x="658368" y="1381810"/>
-            <a:ext cx="10872215" cy="4661306"/>
-          </a:xfrm>
-          <a:prstGeom prst="rect">
-            <a:avLst/>
-          </a:prstGeom>
-        </p:spPr>
-      </p:pic>
-    </p:spTree>
-  </p:cSld>
-  <p:clrMapOvr>
-    <a:masterClrMapping/>
-  </p:clrMapOvr>
-</p:sld>
-</file>
-
-<file path=ppt/slides/slide16.xml><?xml version="1.0" encoding="utf-8"?>
-<p:sld xmlns:a="http://schemas.openxmlformats.org/drawingml/2006/main" xmlns:p="http://schemas.openxmlformats.org/presentationml/2006/main" xmlns:r="http://schemas.openxmlformats.org/officeDocument/2006/relationships">
-  <p:cSld>
-    <p:spTree>
-      <p:nvGrpSpPr>
-        <p:cNvPr id="1" name=""/>
-        <p:cNvGrpSpPr/>
-        <p:nvPr/>
-      </p:nvGrpSpPr>
-      <p:grpSpPr/>
-      <p:pic>
-        <p:nvPicPr>
-          <p:cNvPr id="2" name="Picture 1" descr="logo.png"/>
-          <p:cNvPicPr>
-            <a:picLocks noChangeAspect="1"/>
-          </p:cNvPicPr>
-          <p:nvPr/>
-        </p:nvPicPr>
-        <p:blipFill>
-          <a:blip r:embed="rId2"/>
-          <a:stretch>
-            <a:fillRect/>
-          </a:stretch>
-        </p:blipFill>
-        <p:spPr>
-          <a:xfrm>
-            <a:off x="286207" y="109728"/>
-            <a:ext cx="646480" cy="950976"/>
-          </a:xfrm>
-          <a:prstGeom prst="rect">
-            <a:avLst/>
-          </a:prstGeom>
-        </p:spPr>
-      </p:pic>
-      <p:sp>
-        <p:nvSpPr>
-          <p:cNvPr id="3" name="TextBox 2"/>
-          <p:cNvSpPr txBox="1"/>
-          <p:nvPr/>
-        </p:nvSpPr>
-        <p:spPr>
-          <a:xfrm>
-            <a:off x="1188720" y="384048"/>
-            <a:ext cx="9814255" cy="548640"/>
-          </a:xfrm>
-          <a:prstGeom prst="rect">
-            <a:avLst/>
-          </a:prstGeom>
-          <a:noFill/>
-        </p:spPr>
-        <p:txBody>
-          <a:bodyPr wrap="square" lIns="0" rIns="0" tIns="0" bIns="0">
-            <a:noAutofit/>
-          </a:bodyPr>
-          <a:lstStyle/>
-          <a:p>
-            <a:pPr algn="ctr"/>
-            <a:r>
-              <a:rPr sz="2400" b="1" i="0" u="sng">
-                <a:solidFill>
-                  <a:srgbClr val="000000"/>
-                </a:solidFill>
-                <a:latin typeface="Times New Roman"/>
-              </a:rPr>
-              <a:t>Bill of Materials</a:t>
-            </a:r>
-          </a:p>
-        </p:txBody>
-      </p:sp>
-      <p:sp>
-        <p:nvSpPr>
-          <p:cNvPr id="4" name="TextBox 3"/>
-          <p:cNvSpPr txBox="1"/>
-          <p:nvPr/>
-        </p:nvSpPr>
-        <p:spPr>
-          <a:xfrm>
-            <a:off x="929944" y="6355080"/>
-            <a:ext cx="2286000" cy="292608"/>
-          </a:xfrm>
-          <a:prstGeom prst="rect">
-            <a:avLst/>
-          </a:prstGeom>
-          <a:noFill/>
-        </p:spPr>
-        <p:txBody>
-          <a:bodyPr wrap="square" lIns="0" rIns="0" tIns="0" bIns="0">
-            <a:noAutofit/>
-          </a:bodyPr>
-          <a:lstStyle/>
-          <a:p>
-            <a:r>
-              <a:rPr sz="1200" b="0" i="0" u="none">
-                <a:solidFill>
-                  <a:srgbClr val="898989"/>
-                </a:solidFill>
-                <a:latin typeface="Calibri"/>
-              </a:rPr>
-              <a:t>27-08-2026</a:t>
-            </a:r>
-          </a:p>
-        </p:txBody>
-      </p:sp>
-      <p:sp>
-        <p:nvSpPr>
-          <p:cNvPr id="5" name="TextBox 4"/>
-          <p:cNvSpPr txBox="1"/>
-          <p:nvPr/>
-        </p:nvSpPr>
-        <p:spPr>
-          <a:xfrm>
-            <a:off x="3931920" y="6355080"/>
-            <a:ext cx="4297680" cy="292608"/>
-          </a:xfrm>
-          <a:prstGeom prst="rect">
-            <a:avLst/>
-          </a:prstGeom>
-          <a:noFill/>
-        </p:spPr>
-        <p:txBody>
-          <a:bodyPr wrap="square" lIns="0" rIns="0" tIns="0" bIns="0">
-            <a:noAutofit/>
-          </a:bodyPr>
-          <a:lstStyle/>
-          <a:p>
-            <a:pPr algn="ctr"/>
-            <a:r>
-              <a:rPr sz="1200" b="0" i="0" u="none">
-                <a:solidFill>
-                  <a:srgbClr val="898989"/>
-                </a:solidFill>
-                <a:latin typeface="Calibri"/>
-              </a:rPr>
-              <a:t>First Review-2026-27</a:t>
-            </a:r>
-          </a:p>
-        </p:txBody>
-      </p:sp>
-      <p:sp>
-        <p:nvSpPr>
-          <p:cNvPr id="6" name="TextBox 5"/>
-          <p:cNvSpPr txBox="1"/>
-          <p:nvPr/>
-        </p:nvSpPr>
-        <p:spPr>
-          <a:xfrm>
-            <a:off x="10058400" y="6355080"/>
-            <a:ext cx="1204264" cy="292608"/>
-          </a:xfrm>
-          <a:prstGeom prst="rect">
-            <a:avLst/>
-          </a:prstGeom>
-          <a:noFill/>
-        </p:spPr>
-        <p:txBody>
-          <a:bodyPr wrap="square" lIns="0" rIns="0" tIns="0" bIns="0">
-            <a:noAutofit/>
-          </a:bodyPr>
-          <a:lstStyle/>
-          <a:p>
-            <a:pPr algn="r"/>
-            <a:r>
-              <a:rPr sz="1200" b="0" i="0" u="none">
-                <a:solidFill>
-                  <a:srgbClr val="898989"/>
-                </a:solidFill>
-                <a:latin typeface="Calibri"/>
-              </a:rPr>
-              <a:t>16</a:t>
             </a:r>
           </a:p>
         </p:txBody>
@@ -9002,7 +8553,7 @@
 </p:sld>
 </file>
 
-<file path=ppt/slides/slide17.xml><?xml version="1.0" encoding="utf-8"?>
+<file path=ppt/slides/slide16.xml><?xml version="1.0" encoding="utf-8"?>
 <p:sld xmlns:a="http://schemas.openxmlformats.org/drawingml/2006/main" xmlns:p="http://schemas.openxmlformats.org/presentationml/2006/main" xmlns:r="http://schemas.openxmlformats.org/officeDocument/2006/relationships">
   <p:cSld>
     <p:spTree>
@@ -9170,7 +8721,7 @@
                 </a:solidFill>
                 <a:latin typeface="Calibri"/>
               </a:rPr>
-              <a:t>17</a:t>
+              <a:t>16</a:t>
             </a:r>
           </a:p>
         </p:txBody>
@@ -9707,6 +9258,211 @@
 </p:sld>
 </file>
 
+<file path=ppt/slides/slide17.xml><?xml version="1.0" encoding="utf-8"?>
+<p:sld xmlns:a="http://schemas.openxmlformats.org/drawingml/2006/main" xmlns:p="http://schemas.openxmlformats.org/presentationml/2006/main" xmlns:r="http://schemas.openxmlformats.org/officeDocument/2006/relationships">
+  <p:cSld>
+    <p:spTree>
+      <p:nvGrpSpPr>
+        <p:cNvPr id="1" name=""/>
+        <p:cNvGrpSpPr/>
+        <p:nvPr/>
+      </p:nvGrpSpPr>
+      <p:grpSpPr/>
+      <p:pic>
+        <p:nvPicPr>
+          <p:cNvPr id="2" name="Picture 1" descr="logo.png"/>
+          <p:cNvPicPr>
+            <a:picLocks noChangeAspect="1"/>
+          </p:cNvPicPr>
+          <p:nvPr/>
+        </p:nvPicPr>
+        <p:blipFill>
+          <a:blip r:embed="rId2"/>
+          <a:stretch>
+            <a:fillRect/>
+          </a:stretch>
+        </p:blipFill>
+        <p:spPr>
+          <a:xfrm>
+            <a:off x="286207" y="109728"/>
+            <a:ext cx="646480" cy="950976"/>
+          </a:xfrm>
+          <a:prstGeom prst="rect">
+            <a:avLst/>
+          </a:prstGeom>
+        </p:spPr>
+      </p:pic>
+      <p:sp>
+        <p:nvSpPr>
+          <p:cNvPr id="3" name="TextBox 2"/>
+          <p:cNvSpPr txBox="1"/>
+          <p:nvPr/>
+        </p:nvSpPr>
+        <p:spPr>
+          <a:xfrm>
+            <a:off x="1188720" y="384048"/>
+            <a:ext cx="9814255" cy="548640"/>
+          </a:xfrm>
+          <a:prstGeom prst="rect">
+            <a:avLst/>
+          </a:prstGeom>
+          <a:noFill/>
+        </p:spPr>
+        <p:txBody>
+          <a:bodyPr wrap="square" lIns="0" rIns="0" tIns="0" bIns="0">
+            <a:noAutofit/>
+          </a:bodyPr>
+          <a:lstStyle/>
+          <a:p>
+            <a:pPr algn="ctr"/>
+            <a:r>
+              <a:rPr sz="2400" b="1" i="0" u="sng">
+                <a:solidFill>
+                  <a:srgbClr val="000000"/>
+                </a:solidFill>
+                <a:latin typeface="Times New Roman"/>
+              </a:rPr>
+              <a:t>Work Plan</a:t>
+            </a:r>
+          </a:p>
+        </p:txBody>
+      </p:sp>
+      <p:sp>
+        <p:nvSpPr>
+          <p:cNvPr id="4" name="TextBox 3"/>
+          <p:cNvSpPr txBox="1"/>
+          <p:nvPr/>
+        </p:nvSpPr>
+        <p:spPr>
+          <a:xfrm>
+            <a:off x="929944" y="6355080"/>
+            <a:ext cx="2286000" cy="292608"/>
+          </a:xfrm>
+          <a:prstGeom prst="rect">
+            <a:avLst/>
+          </a:prstGeom>
+          <a:noFill/>
+        </p:spPr>
+        <p:txBody>
+          <a:bodyPr wrap="square" lIns="0" rIns="0" tIns="0" bIns="0">
+            <a:noAutofit/>
+          </a:bodyPr>
+          <a:lstStyle/>
+          <a:p>
+            <a:r>
+              <a:rPr sz="1200" b="0" i="0" u="none">
+                <a:solidFill>
+                  <a:srgbClr val="898989"/>
+                </a:solidFill>
+                <a:latin typeface="Calibri"/>
+              </a:rPr>
+              <a:t>27-08-2026</a:t>
+            </a:r>
+          </a:p>
+        </p:txBody>
+      </p:sp>
+      <p:sp>
+        <p:nvSpPr>
+          <p:cNvPr id="5" name="TextBox 4"/>
+          <p:cNvSpPr txBox="1"/>
+          <p:nvPr/>
+        </p:nvSpPr>
+        <p:spPr>
+          <a:xfrm>
+            <a:off x="3931920" y="6355080"/>
+            <a:ext cx="4297680" cy="292608"/>
+          </a:xfrm>
+          <a:prstGeom prst="rect">
+            <a:avLst/>
+          </a:prstGeom>
+          <a:noFill/>
+        </p:spPr>
+        <p:txBody>
+          <a:bodyPr wrap="square" lIns="0" rIns="0" tIns="0" bIns="0">
+            <a:noAutofit/>
+          </a:bodyPr>
+          <a:lstStyle/>
+          <a:p>
+            <a:pPr algn="ctr"/>
+            <a:r>
+              <a:rPr sz="1200" b="0" i="0" u="none">
+                <a:solidFill>
+                  <a:srgbClr val="898989"/>
+                </a:solidFill>
+                <a:latin typeface="Calibri"/>
+              </a:rPr>
+              <a:t>First Review-2026-27</a:t>
+            </a:r>
+          </a:p>
+        </p:txBody>
+      </p:sp>
+      <p:sp>
+        <p:nvSpPr>
+          <p:cNvPr id="6" name="TextBox 5"/>
+          <p:cNvSpPr txBox="1"/>
+          <p:nvPr/>
+        </p:nvSpPr>
+        <p:spPr>
+          <a:xfrm>
+            <a:off x="10058400" y="6355080"/>
+            <a:ext cx="1204264" cy="292608"/>
+          </a:xfrm>
+          <a:prstGeom prst="rect">
+            <a:avLst/>
+          </a:prstGeom>
+          <a:noFill/>
+        </p:spPr>
+        <p:txBody>
+          <a:bodyPr wrap="square" lIns="0" rIns="0" tIns="0" bIns="0">
+            <a:noAutofit/>
+          </a:bodyPr>
+          <a:lstStyle/>
+          <a:p>
+            <a:pPr algn="r"/>
+            <a:r>
+              <a:rPr sz="1200" b="0" i="0" u="none">
+                <a:solidFill>
+                  <a:srgbClr val="898989"/>
+                </a:solidFill>
+                <a:latin typeface="Calibri"/>
+              </a:rPr>
+              <a:t>17</a:t>
+            </a:r>
+          </a:p>
+        </p:txBody>
+      </p:sp>
+      <p:pic>
+        <p:nvPicPr>
+          <p:cNvPr id="7" name="Picture 6" descr="10_gantt.png"/>
+          <p:cNvPicPr>
+            <a:picLocks noChangeAspect="1"/>
+          </p:cNvPicPr>
+          <p:nvPr/>
+        </p:nvPicPr>
+        <p:blipFill>
+          <a:blip r:embed="rId3"/>
+          <a:stretch>
+            <a:fillRect/>
+          </a:stretch>
+        </p:blipFill>
+        <p:spPr>
+          <a:xfrm>
+            <a:off x="772578" y="1298448"/>
+            <a:ext cx="10643795" cy="4828032"/>
+          </a:xfrm>
+          <a:prstGeom prst="rect">
+            <a:avLst/>
+          </a:prstGeom>
+        </p:spPr>
+      </p:pic>
+    </p:spTree>
+  </p:cSld>
+  <p:clrMapOvr>
+    <a:masterClrMapping/>
+  </p:clrMapOvr>
+</p:sld>
+</file>
+
 <file path=ppt/slides/slide18.xml><?xml version="1.0" encoding="utf-8"?>
 <p:sld xmlns:a="http://schemas.openxmlformats.org/drawingml/2006/main" xmlns:p="http://schemas.openxmlformats.org/presentationml/2006/main" xmlns:r="http://schemas.openxmlformats.org/officeDocument/2006/relationships">
   <p:cSld>
@@ -9771,7 +9527,7 @@
                 </a:solidFill>
                 <a:latin typeface="Times New Roman"/>
               </a:rPr>
-              <a:t>Work Plan</a:t>
+              <a:t>Expected Outcomes</a:t>
             </a:r>
           </a:p>
         </p:txBody>
@@ -9880,30 +9636,113 @@
           </a:p>
         </p:txBody>
       </p:sp>
-      <p:pic>
-        <p:nvPicPr>
-          <p:cNvPr id="7" name="Picture 6" descr="10_gantt.png"/>
-          <p:cNvPicPr>
-            <a:picLocks noChangeAspect="1"/>
-          </p:cNvPicPr>
+      <p:sp>
+        <p:nvSpPr>
+          <p:cNvPr id="7" name="TextBox 6"/>
+          <p:cNvSpPr txBox="1"/>
           <p:nvPr/>
-        </p:nvPicPr>
-        <p:blipFill>
-          <a:blip r:embed="rId3"/>
-          <a:stretch>
-            <a:fillRect/>
-          </a:stretch>
-        </p:blipFill>
-        <p:spPr>
-          <a:xfrm>
-            <a:off x="772578" y="1298448"/>
-            <a:ext cx="10643795" cy="4828032"/>
-          </a:xfrm>
-          <a:prstGeom prst="rect">
-            <a:avLst/>
-          </a:prstGeom>
-        </p:spPr>
-      </p:pic>
+        </p:nvSpPr>
+        <p:spPr>
+          <a:xfrm>
+            <a:off x="1168603" y="1389888"/>
+            <a:ext cx="10195560" cy="4754879"/>
+          </a:xfrm>
+          <a:prstGeom prst="rect">
+            <a:avLst/>
+          </a:prstGeom>
+          <a:noFill/>
+        </p:spPr>
+        <p:txBody>
+          <a:bodyPr wrap="square" lIns="0" rIns="0" tIns="0" bIns="0">
+            <a:noAutofit/>
+          </a:bodyPr>
+          <a:lstStyle/>
+          <a:p>
+            <a:pPr marL="283464" indent="-283464">
+              <a:lnSpc>
+                <a:spcPct val="110000"/>
+              </a:lnSpc>
+              <a:spcAft>
+                <a:spcPts val="2600"/>
+              </a:spcAft>
+              <a:buFont typeface="Arial"/>
+              <a:buChar char="•"/>
+            </a:pPr>
+            <a:r>
+              <a:rPr sz="1800" b="0" i="0" u="none">
+                <a:solidFill>
+                  <a:srgbClr val="000000"/>
+                </a:solidFill>
+                <a:latin typeface="Times New Roman"/>
+              </a:rPr>
+              <a:t>A working 4S BMS that cuts off on temperature rate, demonstrated on the bench</a:t>
+            </a:r>
+          </a:p>
+          <a:p>
+            <a:pPr marL="283464" indent="-283464">
+              <a:lnSpc>
+                <a:spcPct val="110000"/>
+              </a:lnSpc>
+              <a:spcAft>
+                <a:spcPts val="2600"/>
+              </a:spcAft>
+              <a:buFont typeface="Arial"/>
+              <a:buChar char="•"/>
+            </a:pPr>
+            <a:r>
+              <a:rPr sz="1800" b="0" i="0" u="none">
+                <a:solidFill>
+                  <a:srgbClr val="000000"/>
+                </a:solidFill>
+                <a:latin typeface="Times New Roman"/>
+              </a:rPr>
+              <a:t>Measured proof that the rate trip fires earlier than a fixed 60 °C limit</a:t>
+            </a:r>
+          </a:p>
+          <a:p>
+            <a:pPr marL="283464" indent="-283464">
+              <a:lnSpc>
+                <a:spcPct val="110000"/>
+              </a:lnSpc>
+              <a:spcAft>
+                <a:spcPts val="2600"/>
+              </a:spcAft>
+              <a:buFont typeface="Arial"/>
+              <a:buChar char="•"/>
+            </a:pPr>
+            <a:r>
+              <a:rPr sz="1800" b="0" i="0" u="none">
+                <a:solidFill>
+                  <a:srgbClr val="000000"/>
+                </a:solidFill>
+                <a:latin typeface="Times New Roman"/>
+              </a:rPr>
+              <a:t>A live dashboard showing voltage, current, temperature and rate for every cell</a:t>
+            </a:r>
+          </a:p>
+          <a:p>
+            <a:pPr marL="283464" indent="-283464">
+              <a:lnSpc>
+                <a:spcPct val="110000"/>
+              </a:lnSpc>
+              <a:spcAft>
+                <a:spcPts val="2600"/>
+              </a:spcAft>
+              <a:buFont typeface="Arial"/>
+              <a:buChar char="•"/>
+            </a:pPr>
+            <a:r>
+              <a:rPr sz="1800" b="0" i="0" u="none">
+                <a:solidFill>
+                  <a:srgbClr val="000000"/>
+                </a:solidFill>
+                <a:latin typeface="Times New Roman"/>
+              </a:rPr>
+              <a:t>A design that costs about ₹3,000 and uses only parts available in India</a:t>
+            </a:r>
+          </a:p>
+        </p:txBody>
+      </p:sp>
     </p:spTree>
   </p:cSld>
   <p:clrMapOvr>
@@ -9976,7 +9815,7 @@
                 </a:solidFill>
                 <a:latin typeface="Times New Roman"/>
               </a:rPr>
-              <a:t>Expected Outcomes</a:t>
+              <a:t>References</a:t>
             </a:r>
           </a:p>
         </p:txBody>
@@ -10107,87 +9946,148 @@
           </a:bodyPr>
           <a:lstStyle/>
           <a:p>
-            <a:pPr marL="283464" indent="-283464">
+            <a:pPr marL="384048" indent="-384048">
               <a:lnSpc>
                 <a:spcPct val="110000"/>
               </a:lnSpc>
               <a:spcAft>
-                <a:spcPts val="2600"/>
+                <a:spcPts val="2000"/>
               </a:spcAft>
-              <a:buFont typeface="Arial"/>
-              <a:buChar char="•"/>
+              <a:buNone/>
             </a:pPr>
             <a:r>
-              <a:rPr sz="1800" b="0" i="0" u="none">
+              <a:rPr sz="1400" b="0" i="0" u="none">
                 <a:solidFill>
                   <a:srgbClr val="000000"/>
                 </a:solidFill>
                 <a:latin typeface="Times New Roman"/>
               </a:rPr>
-              <a:t>A working 4S BMS that cuts off on temperature rate, demonstrated on the bench</a:t>
-            </a:r>
-          </a:p>
-          <a:p>
-            <a:pPr marL="283464" indent="-283464">
+              <a:t>[1]  </a:t>
+            </a:r>
+            <a:r>
+              <a:rPr sz="1400" b="0" i="0" u="none">
+                <a:solidFill>
+                  <a:srgbClr val="000000"/>
+                </a:solidFill>
+                <a:latin typeface="Times New Roman"/>
+              </a:rPr>
+              <a:t>X. Feng, M. Ouyang, X. Liu, L. Lu, Y. Xia and X. He, “Thermal runaway mechanism of lithium ion battery for electric vehicles: A review,” Energy Storage Materials, vol. 10, pp. 246–267, 2018.</a:t>
+            </a:r>
+          </a:p>
+          <a:p>
+            <a:pPr marL="384048" indent="-384048">
               <a:lnSpc>
                 <a:spcPct val="110000"/>
               </a:lnSpc>
               <a:spcAft>
-                <a:spcPts val="2600"/>
+                <a:spcPts val="2000"/>
               </a:spcAft>
-              <a:buFont typeface="Arial"/>
-              <a:buChar char="•"/>
+              <a:buNone/>
             </a:pPr>
             <a:r>
-              <a:rPr sz="1800" b="0" i="0" u="none">
+              <a:rPr sz="1400" b="0" i="0" u="none">
                 <a:solidFill>
                   <a:srgbClr val="000000"/>
                 </a:solidFill>
                 <a:latin typeface="Times New Roman"/>
               </a:rPr>
-              <a:t>Measured proof that the rate trip fires earlier than a fixed 60 °C limit</a:t>
-            </a:r>
-          </a:p>
-          <a:p>
-            <a:pPr marL="283464" indent="-283464">
+              <a:t>[2]  </a:t>
+            </a:r>
+            <a:r>
+              <a:rPr sz="1400" b="0" i="0" u="none">
+                <a:solidFill>
+                  <a:srgbClr val="000000"/>
+                </a:solidFill>
+                <a:latin typeface="Times New Roman"/>
+              </a:rPr>
+              <a:t>X. Zhang, S. Chen, J. Zhu et al., “A critical review of thermal runaway prediction and early-warning methods for lithium-ion batteries,” Energy Material Advances, vol. 4, art. 0008, 2023.</a:t>
+            </a:r>
+          </a:p>
+          <a:p>
+            <a:pPr marL="384048" indent="-384048">
               <a:lnSpc>
                 <a:spcPct val="110000"/>
               </a:lnSpc>
               <a:spcAft>
-                <a:spcPts val="2600"/>
+                <a:spcPts val="2000"/>
               </a:spcAft>
-              <a:buFont typeface="Arial"/>
-              <a:buChar char="•"/>
+              <a:buNone/>
             </a:pPr>
             <a:r>
-              <a:rPr sz="1800" b="0" i="0" u="none">
+              <a:rPr sz="1400" b="0" i="0" u="none">
                 <a:solidFill>
                   <a:srgbClr val="000000"/>
                 </a:solidFill>
                 <a:latin typeface="Times New Roman"/>
               </a:rPr>
-              <a:t>A live dashboard showing voltage, current, temperature and rate for every cell</a:t>
-            </a:r>
-          </a:p>
-          <a:p>
-            <a:pPr marL="283464" indent="-283464">
+              <a:t>[3]  </a:t>
+            </a:r>
+            <a:r>
+              <a:rPr sz="1400" b="0" i="0" u="none">
+                <a:solidFill>
+                  <a:srgbClr val="000000"/>
+                </a:solidFill>
+                <a:latin typeface="Times New Roman"/>
+              </a:rPr>
+              <a:t>Q. Chen, Y. He, N. Fang and G. Yu, “A combined data-driven and model-based algorithm for accurate battery thermal runaway warning,” Sensors, vol. 24, no. 15, art. 4964, 2024.</a:t>
+            </a:r>
+          </a:p>
+          <a:p>
+            <a:pPr marL="384048" indent="-384048">
               <a:lnSpc>
                 <a:spcPct val="110000"/>
               </a:lnSpc>
               <a:spcAft>
-                <a:spcPts val="2600"/>
+                <a:spcPts val="2000"/>
               </a:spcAft>
-              <a:buFont typeface="Arial"/>
-              <a:buChar char="•"/>
+              <a:buNone/>
             </a:pPr>
             <a:r>
-              <a:rPr sz="1800" b="0" i="0" u="none">
+              <a:rPr sz="1400" b="0" i="0" u="none">
                 <a:solidFill>
                   <a:srgbClr val="000000"/>
                 </a:solidFill>
                 <a:latin typeface="Times New Roman"/>
               </a:rPr>
-              <a:t>A design that costs about ₹3,000 and uses only parts available in India</a:t>
+              <a:t>[4]  </a:t>
+            </a:r>
+            <a:r>
+              <a:rPr sz="1400" b="0" i="0" u="none">
+                <a:solidFill>
+                  <a:srgbClr val="000000"/>
+                </a:solidFill>
+                <a:latin typeface="Times New Roman"/>
+              </a:rPr>
+              <a:t>A. K. M. A. Habib, M. K. Hasan, G. F. Issa, D. Singh, S. Islam and T. M. Ghazal, “Lithium-ion battery management system for electric vehicles: Constraints, challenges and recommendations,” Batteries, vol. 9, no. 3, art. 152, 2023.</a:t>
+            </a:r>
+          </a:p>
+          <a:p>
+            <a:pPr marL="384048" indent="-384048">
+              <a:lnSpc>
+                <a:spcPct val="110000"/>
+              </a:lnSpc>
+              <a:spcAft>
+                <a:spcPts val="2000"/>
+              </a:spcAft>
+              <a:buNone/>
+            </a:pPr>
+            <a:r>
+              <a:rPr sz="1400" b="0" i="0" u="none">
+                <a:solidFill>
+                  <a:srgbClr val="000000"/>
+                </a:solidFill>
+                <a:latin typeface="Times New Roman"/>
+              </a:rPr>
+              <a:t>[5]  </a:t>
+            </a:r>
+            <a:r>
+              <a:rPr sz="1400" b="0" i="0" u="none">
+                <a:solidFill>
+                  <a:srgbClr val="000000"/>
+                </a:solidFill>
+                <a:latin typeface="Times New Roman"/>
+              </a:rPr>
+              <a:t>IS 16046 (Part 2) : 2018 / IEC 62133-2 : 2017, Secondary cells and batteries containing alkaline or other non-acid electrolytes — Part 2: Lithium systems.</a:t>
             </a:r>
           </a:p>
         </p:txBody>
@@ -10400,7 +10300,7 @@
                 <a:spcPct val="110000"/>
               </a:lnSpc>
               <a:spcAft>
-                <a:spcPts val="1300"/>
+                <a:spcPts val="2000"/>
               </a:spcAft>
               <a:buFont typeface="Arial"/>
               <a:buChar char="•"/>
@@ -10412,7 +10312,7 @@
                 </a:solidFill>
                 <a:latin typeface="Times New Roman"/>
               </a:rPr>
-              <a:t>Recap of the zeroth review</a:t>
+              <a:t>Problem statement and objectives</a:t>
             </a:r>
           </a:p>
           <a:p>
@@ -10421,7 +10321,7 @@
                 <a:spcPct val="110000"/>
               </a:lnSpc>
               <a:spcAft>
-                <a:spcPts val="1300"/>
+                <a:spcPts val="2000"/>
               </a:spcAft>
               <a:buFont typeface="Arial"/>
               <a:buChar char="•"/>
@@ -10433,7 +10333,7 @@
                 </a:solidFill>
                 <a:latin typeface="Times New Roman"/>
               </a:rPr>
-              <a:t>Problem statement and objectives</a:t>
+              <a:t>Literature survey</a:t>
             </a:r>
           </a:p>
           <a:p>
@@ -10442,7 +10342,7 @@
                 <a:spcPct val="110000"/>
               </a:lnSpc>
               <a:spcAft>
-                <a:spcPts val="1300"/>
+                <a:spcPts val="2000"/>
               </a:spcAft>
               <a:buFont typeface="Arial"/>
               <a:buChar char="•"/>
@@ -10454,7 +10354,7 @@
                 </a:solidFill>
                 <a:latin typeface="Times New Roman"/>
               </a:rPr>
-              <a:t>Literature survey</a:t>
+              <a:t>Proposed system, hardware and circuits</a:t>
             </a:r>
           </a:p>
           <a:p>
@@ -10463,7 +10363,7 @@
                 <a:spcPct val="110000"/>
               </a:lnSpc>
               <a:spcAft>
-                <a:spcPts val="1300"/>
+                <a:spcPts val="2000"/>
               </a:spcAft>
               <a:buFont typeface="Arial"/>
               <a:buChar char="•"/>
@@ -10475,7 +10375,7 @@
                 </a:solidFill>
                 <a:latin typeface="Times New Roman"/>
               </a:rPr>
-              <a:t>Proposed system, hardware and circuits</a:t>
+              <a:t>Firmware and the predictive algorithm</a:t>
             </a:r>
           </a:p>
           <a:p>
@@ -10484,28 +10384,7 @@
                 <a:spcPct val="110000"/>
               </a:lnSpc>
               <a:spcAft>
-                <a:spcPts val="1300"/>
-              </a:spcAft>
-              <a:buFont typeface="Arial"/>
-              <a:buChar char="•"/>
-            </a:pPr>
-            <a:r>
-              <a:rPr sz="1800" b="0" i="0" u="none">
-                <a:solidFill>
-                  <a:srgbClr val="000000"/>
-                </a:solidFill>
-                <a:latin typeface="Times New Roman"/>
-              </a:rPr>
-              <a:t>Firmware and the predictive algorithm</a:t>
-            </a:r>
-          </a:p>
-          <a:p>
-            <a:pPr marL="283464" indent="-283464">
-              <a:lnSpc>
-                <a:spcPct val="110000"/>
-              </a:lnSpc>
-              <a:spcAft>
-                <a:spcPts val="1300"/>
+                <a:spcPts val="2000"/>
               </a:spcAft>
               <a:buFont typeface="Arial"/>
               <a:buChar char="•"/>
@@ -10572,8 +10451,8 @@
         </p:nvSpPr>
         <p:spPr>
           <a:xfrm>
-            <a:off x="1188720" y="384048"/>
-            <a:ext cx="9814255" cy="548640"/>
+            <a:off x="929944" y="6355080"/>
+            <a:ext cx="2286000" cy="292608"/>
           </a:xfrm>
           <a:prstGeom prst="rect">
             <a:avLst/>
@@ -10586,15 +10465,14 @@
           </a:bodyPr>
           <a:lstStyle/>
           <a:p>
-            <a:pPr algn="ctr"/>
-            <a:r>
-              <a:rPr sz="2400" b="1" i="0" u="sng">
-                <a:solidFill>
-                  <a:srgbClr val="000000"/>
-                </a:solidFill>
-                <a:latin typeface="Times New Roman"/>
-              </a:rPr>
-              <a:t>References</a:t>
+            <a:r>
+              <a:rPr sz="1200" b="0" i="0" u="none">
+                <a:solidFill>
+                  <a:srgbClr val="898989"/>
+                </a:solidFill>
+                <a:latin typeface="Calibri"/>
+              </a:rPr>
+              <a:t>27-08-2026</a:t>
             </a:r>
           </a:p>
         </p:txBody>
@@ -10607,8 +10485,8 @@
         </p:nvSpPr>
         <p:spPr>
           <a:xfrm>
-            <a:off x="929944" y="6355080"/>
-            <a:ext cx="2286000" cy="292608"/>
+            <a:off x="3931920" y="6355080"/>
+            <a:ext cx="4297680" cy="292608"/>
           </a:xfrm>
           <a:prstGeom prst="rect">
             <a:avLst/>
@@ -10621,6 +10499,7 @@
           </a:bodyPr>
           <a:lstStyle/>
           <a:p>
+            <a:pPr algn="ctr"/>
             <a:r>
               <a:rPr sz="1200" b="0" i="0" u="none">
                 <a:solidFill>
@@ -10628,7 +10507,7 @@
                 </a:solidFill>
                 <a:latin typeface="Calibri"/>
               </a:rPr>
-              <a:t>27-08-2026</a:t>
+              <a:t>First Review-2026-27</a:t>
             </a:r>
           </a:p>
         </p:txBody>
@@ -10641,8 +10520,8 @@
         </p:nvSpPr>
         <p:spPr>
           <a:xfrm>
-            <a:off x="3931920" y="6355080"/>
-            <a:ext cx="4297680" cy="292608"/>
+            <a:off x="10058400" y="6355080"/>
+            <a:ext cx="1204264" cy="292608"/>
           </a:xfrm>
           <a:prstGeom prst="rect">
             <a:avLst/>
@@ -10655,7 +10534,7 @@
           </a:bodyPr>
           <a:lstStyle/>
           <a:p>
-            <a:pPr algn="ctr"/>
+            <a:pPr algn="r"/>
             <a:r>
               <a:rPr sz="1200" b="0" i="0" u="none">
                 <a:solidFill>
@@ -10663,356 +10542,7 @@
                 </a:solidFill>
                 <a:latin typeface="Calibri"/>
               </a:rPr>
-              <a:t>First Review-2026-27</a:t>
-            </a:r>
-          </a:p>
-        </p:txBody>
-      </p:sp>
-      <p:sp>
-        <p:nvSpPr>
-          <p:cNvPr id="6" name="TextBox 5"/>
-          <p:cNvSpPr txBox="1"/>
-          <p:nvPr/>
-        </p:nvSpPr>
-        <p:spPr>
-          <a:xfrm>
-            <a:off x="10058400" y="6355080"/>
-            <a:ext cx="1204264" cy="292608"/>
-          </a:xfrm>
-          <a:prstGeom prst="rect">
-            <a:avLst/>
-          </a:prstGeom>
-          <a:noFill/>
-        </p:spPr>
-        <p:txBody>
-          <a:bodyPr wrap="square" lIns="0" rIns="0" tIns="0" bIns="0">
-            <a:noAutofit/>
-          </a:bodyPr>
-          <a:lstStyle/>
-          <a:p>
-            <a:pPr algn="r"/>
-            <a:r>
-              <a:rPr sz="1200" b="0" i="0" u="none">
-                <a:solidFill>
-                  <a:srgbClr val="898989"/>
-                </a:solidFill>
-                <a:latin typeface="Calibri"/>
-              </a:rPr>
               <a:t>20</a:t>
-            </a:r>
-          </a:p>
-        </p:txBody>
-      </p:sp>
-      <p:sp>
-        <p:nvSpPr>
-          <p:cNvPr id="7" name="TextBox 6"/>
-          <p:cNvSpPr txBox="1"/>
-          <p:nvPr/>
-        </p:nvSpPr>
-        <p:spPr>
-          <a:xfrm>
-            <a:off x="1168603" y="1389888"/>
-            <a:ext cx="10195560" cy="4754879"/>
-          </a:xfrm>
-          <a:prstGeom prst="rect">
-            <a:avLst/>
-          </a:prstGeom>
-          <a:noFill/>
-        </p:spPr>
-        <p:txBody>
-          <a:bodyPr wrap="square" lIns="0" rIns="0" tIns="0" bIns="0">
-            <a:noAutofit/>
-          </a:bodyPr>
-          <a:lstStyle/>
-          <a:p>
-            <a:pPr marL="384048" indent="-384048">
-              <a:lnSpc>
-                <a:spcPct val="110000"/>
-              </a:lnSpc>
-              <a:spcAft>
-                <a:spcPts val="2000"/>
-              </a:spcAft>
-              <a:buNone/>
-            </a:pPr>
-            <a:r>
-              <a:rPr sz="1400" b="0" i="0" u="none">
-                <a:solidFill>
-                  <a:srgbClr val="000000"/>
-                </a:solidFill>
-                <a:latin typeface="Times New Roman"/>
-              </a:rPr>
-              <a:t>[1]  </a:t>
-            </a:r>
-            <a:r>
-              <a:rPr sz="1400" b="0" i="0" u="none">
-                <a:solidFill>
-                  <a:srgbClr val="000000"/>
-                </a:solidFill>
-                <a:latin typeface="Times New Roman"/>
-              </a:rPr>
-              <a:t>X. Feng, M. Ouyang, X. Liu, L. Lu, Y. Xia and X. He, “Thermal runaway mechanism of lithium ion battery for electric vehicles: A review,” Energy Storage Materials, vol. 10, pp. 246–267, 2018.</a:t>
-            </a:r>
-          </a:p>
-          <a:p>
-            <a:pPr marL="384048" indent="-384048">
-              <a:lnSpc>
-                <a:spcPct val="110000"/>
-              </a:lnSpc>
-              <a:spcAft>
-                <a:spcPts val="2000"/>
-              </a:spcAft>
-              <a:buNone/>
-            </a:pPr>
-            <a:r>
-              <a:rPr sz="1400" b="0" i="0" u="none">
-                <a:solidFill>
-                  <a:srgbClr val="000000"/>
-                </a:solidFill>
-                <a:latin typeface="Times New Roman"/>
-              </a:rPr>
-              <a:t>[2]  </a:t>
-            </a:r>
-            <a:r>
-              <a:rPr sz="1400" b="0" i="0" u="none">
-                <a:solidFill>
-                  <a:srgbClr val="000000"/>
-                </a:solidFill>
-                <a:latin typeface="Times New Roman"/>
-              </a:rPr>
-              <a:t>X. Zhang, S. Chen, J. Zhu et al., “A critical review of thermal runaway prediction and early-warning methods for lithium-ion batteries,” Energy Material Advances, vol. 4, art. 0008, 2023.</a:t>
-            </a:r>
-          </a:p>
-          <a:p>
-            <a:pPr marL="384048" indent="-384048">
-              <a:lnSpc>
-                <a:spcPct val="110000"/>
-              </a:lnSpc>
-              <a:spcAft>
-                <a:spcPts val="2000"/>
-              </a:spcAft>
-              <a:buNone/>
-            </a:pPr>
-            <a:r>
-              <a:rPr sz="1400" b="0" i="0" u="none">
-                <a:solidFill>
-                  <a:srgbClr val="000000"/>
-                </a:solidFill>
-                <a:latin typeface="Times New Roman"/>
-              </a:rPr>
-              <a:t>[3]  </a:t>
-            </a:r>
-            <a:r>
-              <a:rPr sz="1400" b="0" i="0" u="none">
-                <a:solidFill>
-                  <a:srgbClr val="000000"/>
-                </a:solidFill>
-                <a:latin typeface="Times New Roman"/>
-              </a:rPr>
-              <a:t>Q. Chen, Y. He, N. Fang and G. Yu, “A combined data-driven and model-based algorithm for accurate battery thermal runaway warning,” Sensors, vol. 24, no. 15, art. 4964, 2024.</a:t>
-            </a:r>
-          </a:p>
-          <a:p>
-            <a:pPr marL="384048" indent="-384048">
-              <a:lnSpc>
-                <a:spcPct val="110000"/>
-              </a:lnSpc>
-              <a:spcAft>
-                <a:spcPts val="2000"/>
-              </a:spcAft>
-              <a:buNone/>
-            </a:pPr>
-            <a:r>
-              <a:rPr sz="1400" b="0" i="0" u="none">
-                <a:solidFill>
-                  <a:srgbClr val="000000"/>
-                </a:solidFill>
-                <a:latin typeface="Times New Roman"/>
-              </a:rPr>
-              <a:t>[4]  </a:t>
-            </a:r>
-            <a:r>
-              <a:rPr sz="1400" b="0" i="0" u="none">
-                <a:solidFill>
-                  <a:srgbClr val="000000"/>
-                </a:solidFill>
-                <a:latin typeface="Times New Roman"/>
-              </a:rPr>
-              <a:t>A. K. M. A. Habib, M. K. Hasan, G. F. Issa, D. Singh, S. Islam and T. M. Ghazal, “Lithium-ion battery management system for electric vehicles: Constraints, challenges and recommendations,” Batteries, vol. 9, no. 3, art. 152, 2023.</a:t>
-            </a:r>
-          </a:p>
-          <a:p>
-            <a:pPr marL="384048" indent="-384048">
-              <a:lnSpc>
-                <a:spcPct val="110000"/>
-              </a:lnSpc>
-              <a:spcAft>
-                <a:spcPts val="2000"/>
-              </a:spcAft>
-              <a:buNone/>
-            </a:pPr>
-            <a:r>
-              <a:rPr sz="1400" b="0" i="0" u="none">
-                <a:solidFill>
-                  <a:srgbClr val="000000"/>
-                </a:solidFill>
-                <a:latin typeface="Times New Roman"/>
-              </a:rPr>
-              <a:t>[5]  </a:t>
-            </a:r>
-            <a:r>
-              <a:rPr sz="1400" b="0" i="0" u="none">
-                <a:solidFill>
-                  <a:srgbClr val="000000"/>
-                </a:solidFill>
-                <a:latin typeface="Times New Roman"/>
-              </a:rPr>
-              <a:t>IS 16046 (Part 2) : 2018 / IEC 62133-2 : 2017, Secondary cells and batteries containing alkaline or other non-acid electrolytes — Part 2: Lithium systems.</a:t>
-            </a:r>
-          </a:p>
-        </p:txBody>
-      </p:sp>
-    </p:spTree>
-  </p:cSld>
-  <p:clrMapOvr>
-    <a:masterClrMapping/>
-  </p:clrMapOvr>
-</p:sld>
-</file>
-
-<file path=ppt/slides/slide21.xml><?xml version="1.0" encoding="utf-8"?>
-<p:sld xmlns:a="http://schemas.openxmlformats.org/drawingml/2006/main" xmlns:p="http://schemas.openxmlformats.org/presentationml/2006/main" xmlns:r="http://schemas.openxmlformats.org/officeDocument/2006/relationships">
-  <p:cSld>
-    <p:spTree>
-      <p:nvGrpSpPr>
-        <p:cNvPr id="1" name=""/>
-        <p:cNvGrpSpPr/>
-        <p:nvPr/>
-      </p:nvGrpSpPr>
-      <p:grpSpPr/>
-      <p:pic>
-        <p:nvPicPr>
-          <p:cNvPr id="2" name="Picture 1" descr="logo.png"/>
-          <p:cNvPicPr>
-            <a:picLocks noChangeAspect="1"/>
-          </p:cNvPicPr>
-          <p:nvPr/>
-        </p:nvPicPr>
-        <p:blipFill>
-          <a:blip r:embed="rId2"/>
-          <a:stretch>
-            <a:fillRect/>
-          </a:stretch>
-        </p:blipFill>
-        <p:spPr>
-          <a:xfrm>
-            <a:off x="286207" y="109728"/>
-            <a:ext cx="646480" cy="950976"/>
-          </a:xfrm>
-          <a:prstGeom prst="rect">
-            <a:avLst/>
-          </a:prstGeom>
-        </p:spPr>
-      </p:pic>
-      <p:sp>
-        <p:nvSpPr>
-          <p:cNvPr id="3" name="TextBox 2"/>
-          <p:cNvSpPr txBox="1"/>
-          <p:nvPr/>
-        </p:nvSpPr>
-        <p:spPr>
-          <a:xfrm>
-            <a:off x="929944" y="6355080"/>
-            <a:ext cx="2286000" cy="292608"/>
-          </a:xfrm>
-          <a:prstGeom prst="rect">
-            <a:avLst/>
-          </a:prstGeom>
-          <a:noFill/>
-        </p:spPr>
-        <p:txBody>
-          <a:bodyPr wrap="square" lIns="0" rIns="0" tIns="0" bIns="0">
-            <a:noAutofit/>
-          </a:bodyPr>
-          <a:lstStyle/>
-          <a:p>
-            <a:r>
-              <a:rPr sz="1200" b="0" i="0" u="none">
-                <a:solidFill>
-                  <a:srgbClr val="898989"/>
-                </a:solidFill>
-                <a:latin typeface="Calibri"/>
-              </a:rPr>
-              <a:t>27-08-2026</a:t>
-            </a:r>
-          </a:p>
-        </p:txBody>
-      </p:sp>
-      <p:sp>
-        <p:nvSpPr>
-          <p:cNvPr id="4" name="TextBox 3"/>
-          <p:cNvSpPr txBox="1"/>
-          <p:nvPr/>
-        </p:nvSpPr>
-        <p:spPr>
-          <a:xfrm>
-            <a:off x="3931920" y="6355080"/>
-            <a:ext cx="4297680" cy="292608"/>
-          </a:xfrm>
-          <a:prstGeom prst="rect">
-            <a:avLst/>
-          </a:prstGeom>
-          <a:noFill/>
-        </p:spPr>
-        <p:txBody>
-          <a:bodyPr wrap="square" lIns="0" rIns="0" tIns="0" bIns="0">
-            <a:noAutofit/>
-          </a:bodyPr>
-          <a:lstStyle/>
-          <a:p>
-            <a:pPr algn="ctr"/>
-            <a:r>
-              <a:rPr sz="1200" b="0" i="0" u="none">
-                <a:solidFill>
-                  <a:srgbClr val="898989"/>
-                </a:solidFill>
-                <a:latin typeface="Calibri"/>
-              </a:rPr>
-              <a:t>First Review-2026-27</a:t>
-            </a:r>
-          </a:p>
-        </p:txBody>
-      </p:sp>
-      <p:sp>
-        <p:nvSpPr>
-          <p:cNvPr id="5" name="TextBox 4"/>
-          <p:cNvSpPr txBox="1"/>
-          <p:nvPr/>
-        </p:nvSpPr>
-        <p:spPr>
-          <a:xfrm>
-            <a:off x="10058400" y="6355080"/>
-            <a:ext cx="1204264" cy="292608"/>
-          </a:xfrm>
-          <a:prstGeom prst="rect">
-            <a:avLst/>
-          </a:prstGeom>
-          <a:noFill/>
-        </p:spPr>
-        <p:txBody>
-          <a:bodyPr wrap="square" lIns="0" rIns="0" tIns="0" bIns="0">
-            <a:noAutofit/>
-          </a:bodyPr>
-          <a:lstStyle/>
-          <a:p>
-            <a:pPr algn="r"/>
-            <a:r>
-              <a:rPr sz="1200" b="0" i="0" u="none">
-                <a:solidFill>
-                  <a:srgbClr val="898989"/>
-                </a:solidFill>
-                <a:latin typeface="Calibri"/>
-              </a:rPr>
-              <a:t>21</a:t>
             </a:r>
           </a:p>
         </p:txBody>
@@ -11148,7 +10678,7 @@
                 </a:solidFill>
                 <a:latin typeface="Times New Roman"/>
               </a:rPr>
-              <a:t>Recap of the Zeroth Review</a:t>
+              <a:t>Problem Statement</a:t>
             </a:r>
           </a:p>
         </p:txBody>
@@ -11296,7 +10826,7 @@
                 </a:solidFill>
                 <a:latin typeface="Times New Roman"/>
               </a:rPr>
-              <a:t>The idea was approved: a BMS that acts on how fast a cell heats, not only on how hot it is</a:t>
+              <a:t>A normal small BMS cuts power only when a fixed temperature is crossed, often 60 °C</a:t>
             </a:r>
           </a:p>
           <a:p>
@@ -11317,7 +10847,7 @@
                 </a:solidFill>
                 <a:latin typeface="Times New Roman"/>
               </a:rPr>
-              <a:t>The synopsis and the block diagram were accepted</a:t>
+              <a:t>A cell that is climbing fast at 35 °C is already faulty, but it passes that test</a:t>
             </a:r>
           </a:p>
           <a:p>
@@ -11338,7 +10868,7 @@
                 </a:solidFill>
                 <a:latin typeface="Times New Roman"/>
               </a:rPr>
-              <a:t>My guide signed off, so Phase 1 of the plan is complete</a:t>
+              <a:t>Once a lithium cell starts heating itself, the heat drives more reaction, which makes more heat</a:t>
             </a:r>
           </a:p>
           <a:p>
@@ -11359,7 +10889,7 @@
                 </a:solidFill>
                 <a:latin typeface="Times New Roman"/>
               </a:rPr>
-              <a:t>Since then I have fixed the circuit values and priced every part</a:t>
+              <a:t>A sensor on the outside of a cell always lags what is happening inside it</a:t>
             </a:r>
           </a:p>
           <a:p>
@@ -11380,7 +10910,7 @@
                 </a:solidFill>
                 <a:latin typeface="Times New Roman"/>
               </a:rPr>
-              <a:t>This review covers the detailed design and the firmware plan</a:t>
+              <a:t>So a fixed limit reacts late, and it gives no warning at all beforehand</a:t>
             </a:r>
           </a:p>
         </p:txBody>
@@ -11457,7 +10987,7 @@
                 </a:solidFill>
                 <a:latin typeface="Times New Roman"/>
               </a:rPr>
-              <a:t>Problem Statement</a:t>
+              <a:t>Objectives</a:t>
             </a:r>
           </a:p>
         </p:txBody>
@@ -11605,7 +11135,7 @@
                 </a:solidFill>
                 <a:latin typeface="Times New Roman"/>
               </a:rPr>
-              <a:t>A normal small BMS cuts power only when a fixed temperature is crossed, often 60 °C</a:t>
+              <a:t>Build a working 4S battery management system for 18650 cells</a:t>
             </a:r>
           </a:p>
           <a:p>
@@ -11626,7 +11156,7 @@
                 </a:solidFill>
                 <a:latin typeface="Times New Roman"/>
               </a:rPr>
-              <a:t>A cell that is climbing fast at 35 °C is already faulty, but it passes that test</a:t>
+              <a:t>Measure four cell voltages, the pack current and four cell temperatures</a:t>
             </a:r>
           </a:p>
           <a:p>
@@ -11647,7 +11177,7 @@
                 </a:solidFill>
                 <a:latin typeface="Times New Roman"/>
               </a:rPr>
-              <a:t>Once a lithium cell starts heating itself, the heat drives more reaction, which makes more heat</a:t>
+              <a:t>Trip on the rate at which temperature rises, not only on its value</a:t>
             </a:r>
           </a:p>
           <a:p>
@@ -11668,7 +11198,7 @@
                 </a:solidFill>
                 <a:latin typeface="Times New Roman"/>
               </a:rPr>
-              <a:t>A sensor on the outside of a cell always lags what is happening inside it</a:t>
+              <a:t>Switch charging and discharging separately, so only the unsafe direction stops</a:t>
             </a:r>
           </a:p>
           <a:p>
@@ -11689,7 +11219,7 @@
                 </a:solidFill>
                 <a:latin typeface="Times New Roman"/>
               </a:rPr>
-              <a:t>So a fixed limit reacts late, and it gives no warning at all beforehand</a:t>
+              <a:t>Send every reading over Wi-Fi to a page that opens on a phone or a laptop</a:t>
             </a:r>
           </a:p>
         </p:txBody>
@@ -11766,7 +11296,7 @@
                 </a:solidFill>
                 <a:latin typeface="Times New Roman"/>
               </a:rPr>
-              <a:t>Objectives</a:t>
+              <a:t>Literature Survey</a:t>
             </a:r>
           </a:p>
         </p:txBody>
@@ -11871,315 +11401,6 @@
                 <a:latin typeface="Calibri"/>
               </a:rPr>
               <a:t>5</a:t>
-            </a:r>
-          </a:p>
-        </p:txBody>
-      </p:sp>
-      <p:sp>
-        <p:nvSpPr>
-          <p:cNvPr id="7" name="TextBox 6"/>
-          <p:cNvSpPr txBox="1"/>
-          <p:nvPr/>
-        </p:nvSpPr>
-        <p:spPr>
-          <a:xfrm>
-            <a:off x="1168603" y="1389888"/>
-            <a:ext cx="10195560" cy="4754879"/>
-          </a:xfrm>
-          <a:prstGeom prst="rect">
-            <a:avLst/>
-          </a:prstGeom>
-          <a:noFill/>
-        </p:spPr>
-        <p:txBody>
-          <a:bodyPr wrap="square" lIns="0" rIns="0" tIns="0" bIns="0">
-            <a:noAutofit/>
-          </a:bodyPr>
-          <a:lstStyle/>
-          <a:p>
-            <a:pPr marL="283464" indent="-283464">
-              <a:lnSpc>
-                <a:spcPct val="110000"/>
-              </a:lnSpc>
-              <a:spcAft>
-                <a:spcPts val="2000"/>
-              </a:spcAft>
-              <a:buFont typeface="Arial"/>
-              <a:buChar char="•"/>
-            </a:pPr>
-            <a:r>
-              <a:rPr sz="1800" b="0" i="0" u="none">
-                <a:solidFill>
-                  <a:srgbClr val="000000"/>
-                </a:solidFill>
-                <a:latin typeface="Times New Roman"/>
-              </a:rPr>
-              <a:t>Build a working 4S battery management system for 18650 cells</a:t>
-            </a:r>
-          </a:p>
-          <a:p>
-            <a:pPr marL="283464" indent="-283464">
-              <a:lnSpc>
-                <a:spcPct val="110000"/>
-              </a:lnSpc>
-              <a:spcAft>
-                <a:spcPts val="2000"/>
-              </a:spcAft>
-              <a:buFont typeface="Arial"/>
-              <a:buChar char="•"/>
-            </a:pPr>
-            <a:r>
-              <a:rPr sz="1800" b="0" i="0" u="none">
-                <a:solidFill>
-                  <a:srgbClr val="000000"/>
-                </a:solidFill>
-                <a:latin typeface="Times New Roman"/>
-              </a:rPr>
-              <a:t>Measure four cell voltages, the pack current and four cell temperatures</a:t>
-            </a:r>
-          </a:p>
-          <a:p>
-            <a:pPr marL="283464" indent="-283464">
-              <a:lnSpc>
-                <a:spcPct val="110000"/>
-              </a:lnSpc>
-              <a:spcAft>
-                <a:spcPts val="2000"/>
-              </a:spcAft>
-              <a:buFont typeface="Arial"/>
-              <a:buChar char="•"/>
-            </a:pPr>
-            <a:r>
-              <a:rPr sz="1800" b="0" i="0" u="none">
-                <a:solidFill>
-                  <a:srgbClr val="000000"/>
-                </a:solidFill>
-                <a:latin typeface="Times New Roman"/>
-              </a:rPr>
-              <a:t>Trip on the rate at which temperature rises, not only on its value</a:t>
-            </a:r>
-          </a:p>
-          <a:p>
-            <a:pPr marL="283464" indent="-283464">
-              <a:lnSpc>
-                <a:spcPct val="110000"/>
-              </a:lnSpc>
-              <a:spcAft>
-                <a:spcPts val="2000"/>
-              </a:spcAft>
-              <a:buFont typeface="Arial"/>
-              <a:buChar char="•"/>
-            </a:pPr>
-            <a:r>
-              <a:rPr sz="1800" b="0" i="0" u="none">
-                <a:solidFill>
-                  <a:srgbClr val="000000"/>
-                </a:solidFill>
-                <a:latin typeface="Times New Roman"/>
-              </a:rPr>
-              <a:t>Switch charging and discharging separately, so only the unsafe direction stops</a:t>
-            </a:r>
-          </a:p>
-          <a:p>
-            <a:pPr marL="283464" indent="-283464">
-              <a:lnSpc>
-                <a:spcPct val="110000"/>
-              </a:lnSpc>
-              <a:spcAft>
-                <a:spcPts val="2000"/>
-              </a:spcAft>
-              <a:buFont typeface="Arial"/>
-              <a:buChar char="•"/>
-            </a:pPr>
-            <a:r>
-              <a:rPr sz="1800" b="0" i="0" u="none">
-                <a:solidFill>
-                  <a:srgbClr val="000000"/>
-                </a:solidFill>
-                <a:latin typeface="Times New Roman"/>
-              </a:rPr>
-              <a:t>Send every reading over Wi-Fi to a page that opens on a phone or a laptop</a:t>
-            </a:r>
-          </a:p>
-        </p:txBody>
-      </p:sp>
-    </p:spTree>
-  </p:cSld>
-  <p:clrMapOvr>
-    <a:masterClrMapping/>
-  </p:clrMapOvr>
-</p:sld>
-</file>
-
-<file path=ppt/slides/slide6.xml><?xml version="1.0" encoding="utf-8"?>
-<p:sld xmlns:a="http://schemas.openxmlformats.org/drawingml/2006/main" xmlns:p="http://schemas.openxmlformats.org/presentationml/2006/main" xmlns:r="http://schemas.openxmlformats.org/officeDocument/2006/relationships">
-  <p:cSld>
-    <p:spTree>
-      <p:nvGrpSpPr>
-        <p:cNvPr id="1" name=""/>
-        <p:cNvGrpSpPr/>
-        <p:nvPr/>
-      </p:nvGrpSpPr>
-      <p:grpSpPr/>
-      <p:pic>
-        <p:nvPicPr>
-          <p:cNvPr id="2" name="Picture 1" descr="logo.png"/>
-          <p:cNvPicPr>
-            <a:picLocks noChangeAspect="1"/>
-          </p:cNvPicPr>
-          <p:nvPr/>
-        </p:nvPicPr>
-        <p:blipFill>
-          <a:blip r:embed="rId2"/>
-          <a:stretch>
-            <a:fillRect/>
-          </a:stretch>
-        </p:blipFill>
-        <p:spPr>
-          <a:xfrm>
-            <a:off x="286207" y="109728"/>
-            <a:ext cx="646480" cy="950976"/>
-          </a:xfrm>
-          <a:prstGeom prst="rect">
-            <a:avLst/>
-          </a:prstGeom>
-        </p:spPr>
-      </p:pic>
-      <p:sp>
-        <p:nvSpPr>
-          <p:cNvPr id="3" name="TextBox 2"/>
-          <p:cNvSpPr txBox="1"/>
-          <p:nvPr/>
-        </p:nvSpPr>
-        <p:spPr>
-          <a:xfrm>
-            <a:off x="1188720" y="384048"/>
-            <a:ext cx="9814255" cy="548640"/>
-          </a:xfrm>
-          <a:prstGeom prst="rect">
-            <a:avLst/>
-          </a:prstGeom>
-          <a:noFill/>
-        </p:spPr>
-        <p:txBody>
-          <a:bodyPr wrap="square" lIns="0" rIns="0" tIns="0" bIns="0">
-            <a:noAutofit/>
-          </a:bodyPr>
-          <a:lstStyle/>
-          <a:p>
-            <a:pPr algn="ctr"/>
-            <a:r>
-              <a:rPr sz="2400" b="1" i="0" u="sng">
-                <a:solidFill>
-                  <a:srgbClr val="000000"/>
-                </a:solidFill>
-                <a:latin typeface="Times New Roman"/>
-              </a:rPr>
-              <a:t>Literature Survey</a:t>
-            </a:r>
-          </a:p>
-        </p:txBody>
-      </p:sp>
-      <p:sp>
-        <p:nvSpPr>
-          <p:cNvPr id="4" name="TextBox 3"/>
-          <p:cNvSpPr txBox="1"/>
-          <p:nvPr/>
-        </p:nvSpPr>
-        <p:spPr>
-          <a:xfrm>
-            <a:off x="929944" y="6355080"/>
-            <a:ext cx="2286000" cy="292608"/>
-          </a:xfrm>
-          <a:prstGeom prst="rect">
-            <a:avLst/>
-          </a:prstGeom>
-          <a:noFill/>
-        </p:spPr>
-        <p:txBody>
-          <a:bodyPr wrap="square" lIns="0" rIns="0" tIns="0" bIns="0">
-            <a:noAutofit/>
-          </a:bodyPr>
-          <a:lstStyle/>
-          <a:p>
-            <a:r>
-              <a:rPr sz="1200" b="0" i="0" u="none">
-                <a:solidFill>
-                  <a:srgbClr val="898989"/>
-                </a:solidFill>
-                <a:latin typeface="Calibri"/>
-              </a:rPr>
-              <a:t>27-08-2026</a:t>
-            </a:r>
-          </a:p>
-        </p:txBody>
-      </p:sp>
-      <p:sp>
-        <p:nvSpPr>
-          <p:cNvPr id="5" name="TextBox 4"/>
-          <p:cNvSpPr txBox="1"/>
-          <p:nvPr/>
-        </p:nvSpPr>
-        <p:spPr>
-          <a:xfrm>
-            <a:off x="3931920" y="6355080"/>
-            <a:ext cx="4297680" cy="292608"/>
-          </a:xfrm>
-          <a:prstGeom prst="rect">
-            <a:avLst/>
-          </a:prstGeom>
-          <a:noFill/>
-        </p:spPr>
-        <p:txBody>
-          <a:bodyPr wrap="square" lIns="0" rIns="0" tIns="0" bIns="0">
-            <a:noAutofit/>
-          </a:bodyPr>
-          <a:lstStyle/>
-          <a:p>
-            <a:pPr algn="ctr"/>
-            <a:r>
-              <a:rPr sz="1200" b="0" i="0" u="none">
-                <a:solidFill>
-                  <a:srgbClr val="898989"/>
-                </a:solidFill>
-                <a:latin typeface="Calibri"/>
-              </a:rPr>
-              <a:t>First Review-2026-27</a:t>
-            </a:r>
-          </a:p>
-        </p:txBody>
-      </p:sp>
-      <p:sp>
-        <p:nvSpPr>
-          <p:cNvPr id="6" name="TextBox 5"/>
-          <p:cNvSpPr txBox="1"/>
-          <p:nvPr/>
-        </p:nvSpPr>
-        <p:spPr>
-          <a:xfrm>
-            <a:off x="10058400" y="6355080"/>
-            <a:ext cx="1204264" cy="292608"/>
-          </a:xfrm>
-          <a:prstGeom prst="rect">
-            <a:avLst/>
-          </a:prstGeom>
-          <a:noFill/>
-        </p:spPr>
-        <p:txBody>
-          <a:bodyPr wrap="square" lIns="0" rIns="0" tIns="0" bIns="0">
-            <a:noAutofit/>
-          </a:bodyPr>
-          <a:lstStyle/>
-          <a:p>
-            <a:pPr algn="r"/>
-            <a:r>
-              <a:rPr sz="1200" b="0" i="0" u="none">
-                <a:solidFill>
-                  <a:srgbClr val="898989"/>
-                </a:solidFill>
-                <a:latin typeface="Calibri"/>
-              </a:rPr>
-              <a:t>6</a:t>
             </a:r>
           </a:p>
         </p:txBody>
@@ -12806,6 +12027,270 @@
 </p:sld>
 </file>
 
+<file path=ppt/slides/slide6.xml><?xml version="1.0" encoding="utf-8"?>
+<p:sld xmlns:a="http://schemas.openxmlformats.org/drawingml/2006/main" xmlns:p="http://schemas.openxmlformats.org/presentationml/2006/main" xmlns:r="http://schemas.openxmlformats.org/officeDocument/2006/relationships">
+  <p:cSld>
+    <p:spTree>
+      <p:nvGrpSpPr>
+        <p:cNvPr id="1" name=""/>
+        <p:cNvGrpSpPr/>
+        <p:nvPr/>
+      </p:nvGrpSpPr>
+      <p:grpSpPr/>
+      <p:pic>
+        <p:nvPicPr>
+          <p:cNvPr id="2" name="Picture 1" descr="logo.png"/>
+          <p:cNvPicPr>
+            <a:picLocks noChangeAspect="1"/>
+          </p:cNvPicPr>
+          <p:nvPr/>
+        </p:nvPicPr>
+        <p:blipFill>
+          <a:blip r:embed="rId2"/>
+          <a:stretch>
+            <a:fillRect/>
+          </a:stretch>
+        </p:blipFill>
+        <p:spPr>
+          <a:xfrm>
+            <a:off x="286207" y="109728"/>
+            <a:ext cx="646480" cy="950976"/>
+          </a:xfrm>
+          <a:prstGeom prst="rect">
+            <a:avLst/>
+          </a:prstGeom>
+        </p:spPr>
+      </p:pic>
+      <p:sp>
+        <p:nvSpPr>
+          <p:cNvPr id="3" name="TextBox 2"/>
+          <p:cNvSpPr txBox="1"/>
+          <p:nvPr/>
+        </p:nvSpPr>
+        <p:spPr>
+          <a:xfrm>
+            <a:off x="1188720" y="384048"/>
+            <a:ext cx="9814255" cy="548640"/>
+          </a:xfrm>
+          <a:prstGeom prst="rect">
+            <a:avLst/>
+          </a:prstGeom>
+          <a:noFill/>
+        </p:spPr>
+        <p:txBody>
+          <a:bodyPr wrap="square" lIns="0" rIns="0" tIns="0" bIns="0">
+            <a:noAutofit/>
+          </a:bodyPr>
+          <a:lstStyle/>
+          <a:p>
+            <a:pPr algn="ctr"/>
+            <a:r>
+              <a:rPr sz="2400" b="1" i="0" u="sng">
+                <a:solidFill>
+                  <a:srgbClr val="000000"/>
+                </a:solidFill>
+                <a:latin typeface="Times New Roman"/>
+              </a:rPr>
+              <a:t>Proposed System</a:t>
+            </a:r>
+          </a:p>
+        </p:txBody>
+      </p:sp>
+      <p:sp>
+        <p:nvSpPr>
+          <p:cNvPr id="4" name="TextBox 3"/>
+          <p:cNvSpPr txBox="1"/>
+          <p:nvPr/>
+        </p:nvSpPr>
+        <p:spPr>
+          <a:xfrm>
+            <a:off x="929944" y="6355080"/>
+            <a:ext cx="2286000" cy="292608"/>
+          </a:xfrm>
+          <a:prstGeom prst="rect">
+            <a:avLst/>
+          </a:prstGeom>
+          <a:noFill/>
+        </p:spPr>
+        <p:txBody>
+          <a:bodyPr wrap="square" lIns="0" rIns="0" tIns="0" bIns="0">
+            <a:noAutofit/>
+          </a:bodyPr>
+          <a:lstStyle/>
+          <a:p>
+            <a:r>
+              <a:rPr sz="1200" b="0" i="0" u="none">
+                <a:solidFill>
+                  <a:srgbClr val="898989"/>
+                </a:solidFill>
+                <a:latin typeface="Calibri"/>
+              </a:rPr>
+              <a:t>27-08-2026</a:t>
+            </a:r>
+          </a:p>
+        </p:txBody>
+      </p:sp>
+      <p:sp>
+        <p:nvSpPr>
+          <p:cNvPr id="5" name="TextBox 4"/>
+          <p:cNvSpPr txBox="1"/>
+          <p:nvPr/>
+        </p:nvSpPr>
+        <p:spPr>
+          <a:xfrm>
+            <a:off x="3931920" y="6355080"/>
+            <a:ext cx="4297680" cy="292608"/>
+          </a:xfrm>
+          <a:prstGeom prst="rect">
+            <a:avLst/>
+          </a:prstGeom>
+          <a:noFill/>
+        </p:spPr>
+        <p:txBody>
+          <a:bodyPr wrap="square" lIns="0" rIns="0" tIns="0" bIns="0">
+            <a:noAutofit/>
+          </a:bodyPr>
+          <a:lstStyle/>
+          <a:p>
+            <a:pPr algn="ctr"/>
+            <a:r>
+              <a:rPr sz="1200" b="0" i="0" u="none">
+                <a:solidFill>
+                  <a:srgbClr val="898989"/>
+                </a:solidFill>
+                <a:latin typeface="Calibri"/>
+              </a:rPr>
+              <a:t>First Review-2026-27</a:t>
+            </a:r>
+          </a:p>
+        </p:txBody>
+      </p:sp>
+      <p:sp>
+        <p:nvSpPr>
+          <p:cNvPr id="6" name="TextBox 5"/>
+          <p:cNvSpPr txBox="1"/>
+          <p:nvPr/>
+        </p:nvSpPr>
+        <p:spPr>
+          <a:xfrm>
+            <a:off x="10058400" y="6355080"/>
+            <a:ext cx="1204264" cy="292608"/>
+          </a:xfrm>
+          <a:prstGeom prst="rect">
+            <a:avLst/>
+          </a:prstGeom>
+          <a:noFill/>
+        </p:spPr>
+        <p:txBody>
+          <a:bodyPr wrap="square" lIns="0" rIns="0" tIns="0" bIns="0">
+            <a:noAutofit/>
+          </a:bodyPr>
+          <a:lstStyle/>
+          <a:p>
+            <a:pPr algn="r"/>
+            <a:r>
+              <a:rPr sz="1200" b="0" i="0" u="none">
+                <a:solidFill>
+                  <a:srgbClr val="898989"/>
+                </a:solidFill>
+                <a:latin typeface="Calibri"/>
+              </a:rPr>
+              <a:t>6</a:t>
+            </a:r>
+          </a:p>
+        </p:txBody>
+      </p:sp>
+      <p:sp>
+        <p:nvSpPr>
+          <p:cNvPr id="7" name="TextBox 6"/>
+          <p:cNvSpPr txBox="1"/>
+          <p:nvPr/>
+        </p:nvSpPr>
+        <p:spPr>
+          <a:xfrm>
+            <a:off x="1168603" y="1298448"/>
+            <a:ext cx="10195560" cy="914400"/>
+          </a:xfrm>
+          <a:prstGeom prst="rect">
+            <a:avLst/>
+          </a:prstGeom>
+          <a:noFill/>
+        </p:spPr>
+        <p:txBody>
+          <a:bodyPr wrap="square" lIns="0" rIns="0" tIns="0" bIns="0">
+            <a:noAutofit/>
+          </a:bodyPr>
+          <a:lstStyle/>
+          <a:p>
+            <a:pPr marL="283464" indent="-283464">
+              <a:spcAft>
+                <a:spcPts val="600"/>
+              </a:spcAft>
+              <a:buFont typeface="Arial"/>
+              <a:buChar char="•"/>
+            </a:pPr>
+            <a:r>
+              <a:rPr sz="1700" b="0" i="0" u="none">
+                <a:solidFill>
+                  <a:srgbClr val="000000"/>
+                </a:solidFill>
+                <a:latin typeface="Times New Roman"/>
+              </a:rPr>
+              <a:t>The pack, the sensing, the controller and the protection sit in one loop</a:t>
+            </a:r>
+          </a:p>
+          <a:p>
+            <a:pPr marL="283464" indent="-283464">
+              <a:spcAft>
+                <a:spcPts val="600"/>
+              </a:spcAft>
+              <a:buFont typeface="Arial"/>
+              <a:buChar char="•"/>
+            </a:pPr>
+            <a:r>
+              <a:rPr sz="1700" b="0" i="0" u="none">
+                <a:solidFill>
+                  <a:srgbClr val="000000"/>
+                </a:solidFill>
+                <a:latin typeface="Times New Roman"/>
+              </a:rPr>
+              <a:t>The same readings are used to protect the pack and to feed the dashboard</a:t>
+            </a:r>
+          </a:p>
+        </p:txBody>
+      </p:sp>
+      <p:pic>
+        <p:nvPicPr>
+          <p:cNvPr id="8" name="Picture 7" descr="01_system_block.png"/>
+          <p:cNvPicPr>
+            <a:picLocks noChangeAspect="1"/>
+          </p:cNvPicPr>
+          <p:nvPr/>
+        </p:nvPicPr>
+        <p:blipFill>
+          <a:blip r:embed="rId3"/>
+          <a:stretch>
+            <a:fillRect/>
+          </a:stretch>
+        </p:blipFill>
+        <p:spPr>
+          <a:xfrm>
+            <a:off x="2184195" y="2267712"/>
+            <a:ext cx="7820561" cy="3858768"/>
+          </a:xfrm>
+          <a:prstGeom prst="rect">
+            <a:avLst/>
+          </a:prstGeom>
+        </p:spPr>
+      </p:pic>
+    </p:spTree>
+  </p:cSld>
+  <p:clrMapOvr>
+    <a:masterClrMapping/>
+  </p:clrMapOvr>
+</p:sld>
+</file>
+
 <file path=ppt/slides/slide7.xml><?xml version="1.0" encoding="utf-8"?>
 <p:sld xmlns:a="http://schemas.openxmlformats.org/drawingml/2006/main" xmlns:p="http://schemas.openxmlformats.org/presentationml/2006/main" xmlns:r="http://schemas.openxmlformats.org/officeDocument/2006/relationships">
   <p:cSld>
@@ -12870,7 +12355,7 @@
                 </a:solidFill>
                 <a:latin typeface="Times New Roman"/>
               </a:rPr>
-              <a:t>Proposed System</a:t>
+              <a:t>Hardware Architecture</a:t>
             </a:r>
           </a:p>
         </p:txBody>
@@ -12979,68 +12464,9 @@
           </a:p>
         </p:txBody>
       </p:sp>
-      <p:sp>
-        <p:nvSpPr>
-          <p:cNvPr id="7" name="TextBox 6"/>
-          <p:cNvSpPr txBox="1"/>
-          <p:nvPr/>
-        </p:nvSpPr>
-        <p:spPr>
-          <a:xfrm>
-            <a:off x="1168603" y="1298448"/>
-            <a:ext cx="10195560" cy="914400"/>
-          </a:xfrm>
-          <a:prstGeom prst="rect">
-            <a:avLst/>
-          </a:prstGeom>
-          <a:noFill/>
-        </p:spPr>
-        <p:txBody>
-          <a:bodyPr wrap="square" lIns="0" rIns="0" tIns="0" bIns="0">
-            <a:noAutofit/>
-          </a:bodyPr>
-          <a:lstStyle/>
-          <a:p>
-            <a:pPr marL="283464" indent="-283464">
-              <a:spcAft>
-                <a:spcPts val="600"/>
-              </a:spcAft>
-              <a:buFont typeface="Arial"/>
-              <a:buChar char="•"/>
-            </a:pPr>
-            <a:r>
-              <a:rPr sz="1700" b="0" i="0" u="none">
-                <a:solidFill>
-                  <a:srgbClr val="000000"/>
-                </a:solidFill>
-                <a:latin typeface="Times New Roman"/>
-              </a:rPr>
-              <a:t>The pack, the sensing, the controller and the protection sit in one loop</a:t>
-            </a:r>
-          </a:p>
-          <a:p>
-            <a:pPr marL="283464" indent="-283464">
-              <a:spcAft>
-                <a:spcPts val="600"/>
-              </a:spcAft>
-              <a:buFont typeface="Arial"/>
-              <a:buChar char="•"/>
-            </a:pPr>
-            <a:r>
-              <a:rPr sz="1700" b="0" i="0" u="none">
-                <a:solidFill>
-                  <a:srgbClr val="000000"/>
-                </a:solidFill>
-                <a:latin typeface="Times New Roman"/>
-              </a:rPr>
-              <a:t>The same readings are used to protect the pack and to feed the dashboard</a:t>
-            </a:r>
-          </a:p>
-        </p:txBody>
-      </p:sp>
       <p:pic>
         <p:nvPicPr>
-          <p:cNvPr id="8" name="Picture 7" descr="01_system_block.png"/>
+          <p:cNvPr id="7" name="Picture 6" descr="02_hardware_architecture.png"/>
           <p:cNvPicPr>
             <a:picLocks noChangeAspect="1"/>
           </p:cNvPicPr>
@@ -13054,8 +12480,8 @@
         </p:blipFill>
         <p:spPr>
           <a:xfrm>
-            <a:off x="2184195" y="2267712"/>
-            <a:ext cx="7820561" cy="3858768"/>
+            <a:off x="878477" y="1298448"/>
+            <a:ext cx="10431997" cy="4828032"/>
           </a:xfrm>
           <a:prstGeom prst="rect">
             <a:avLst/>
@@ -13134,7 +12560,7 @@
                 </a:solidFill>
                 <a:latin typeface="Times New Roman"/>
               </a:rPr>
-              <a:t>Hardware Architecture</a:t>
+              <a:t>Power Path — Single Line Diagram</a:t>
             </a:r>
           </a:p>
         </p:txBody>
@@ -13243,9 +12669,68 @@
           </a:p>
         </p:txBody>
       </p:sp>
+      <p:sp>
+        <p:nvSpPr>
+          <p:cNvPr id="7" name="TextBox 6"/>
+          <p:cNvSpPr txBox="1"/>
+          <p:nvPr/>
+        </p:nvSpPr>
+        <p:spPr>
+          <a:xfrm>
+            <a:off x="1168603" y="1298448"/>
+            <a:ext cx="10195560" cy="914400"/>
+          </a:xfrm>
+          <a:prstGeom prst="rect">
+            <a:avLst/>
+          </a:prstGeom>
+          <a:noFill/>
+        </p:spPr>
+        <p:txBody>
+          <a:bodyPr wrap="square" lIns="0" rIns="0" tIns="0" bIns="0">
+            <a:noAutofit/>
+          </a:bodyPr>
+          <a:lstStyle/>
+          <a:p>
+            <a:pPr marL="283464" indent="-283464">
+              <a:spcAft>
+                <a:spcPts val="600"/>
+              </a:spcAft>
+              <a:buFont typeface="Arial"/>
+              <a:buChar char="•"/>
+            </a:pPr>
+            <a:r>
+              <a:rPr sz="1700" b="0" i="0" u="none">
+                <a:solidFill>
+                  <a:srgbClr val="000000"/>
+                </a:solidFill>
+                <a:latin typeface="Times New Roman"/>
+              </a:rPr>
+              <a:t>The 15 A fuse is the backstop if the electronics fail completely</a:t>
+            </a:r>
+          </a:p>
+          <a:p>
+            <a:pPr marL="283464" indent="-283464">
+              <a:spcAft>
+                <a:spcPts val="600"/>
+              </a:spcAft>
+              <a:buFont typeface="Arial"/>
+              <a:buChar char="•"/>
+            </a:pPr>
+            <a:r>
+              <a:rPr sz="1700" b="0" i="0" u="none">
+                <a:solidFill>
+                  <a:srgbClr val="000000"/>
+                </a:solidFill>
+                <a:latin typeface="Times New Roman"/>
+              </a:rPr>
+              <a:t>Both switches sit in the negative return, so both gates drive against ground</a:t>
+            </a:r>
+          </a:p>
+        </p:txBody>
+      </p:sp>
       <p:pic>
         <p:nvPicPr>
-          <p:cNvPr id="7" name="Picture 6" descr="02_hardware_architecture.png"/>
+          <p:cNvPr id="8" name="Picture 7" descr="03_power_path_sld.png"/>
           <p:cNvPicPr>
             <a:picLocks noChangeAspect="1"/>
           </p:cNvPicPr>
@@ -13259,8 +12744,8 @@
         </p:blipFill>
         <p:spPr>
           <a:xfrm>
-            <a:off x="878477" y="1298448"/>
-            <a:ext cx="10431997" cy="4828032"/>
+            <a:off x="1096422" y="2267712"/>
+            <a:ext cx="9996107" cy="3858768"/>
           </a:xfrm>
           <a:prstGeom prst="rect">
             <a:avLst/>
@@ -13339,7 +12824,7 @@
                 </a:solidFill>
                 <a:latin typeface="Times New Roman"/>
               </a:rPr>
-              <a:t>Power Path — Single Line Diagram</a:t>
+              <a:t>Sensing Circuits</a:t>
             </a:r>
           </a:p>
         </p:txBody>
@@ -13448,68 +12933,9 @@
           </a:p>
         </p:txBody>
       </p:sp>
-      <p:sp>
-        <p:nvSpPr>
-          <p:cNvPr id="7" name="TextBox 6"/>
-          <p:cNvSpPr txBox="1"/>
-          <p:nvPr/>
-        </p:nvSpPr>
-        <p:spPr>
-          <a:xfrm>
-            <a:off x="1168603" y="1298448"/>
-            <a:ext cx="10195560" cy="914400"/>
-          </a:xfrm>
-          <a:prstGeom prst="rect">
-            <a:avLst/>
-          </a:prstGeom>
-          <a:noFill/>
-        </p:spPr>
-        <p:txBody>
-          <a:bodyPr wrap="square" lIns="0" rIns="0" tIns="0" bIns="0">
-            <a:noAutofit/>
-          </a:bodyPr>
-          <a:lstStyle/>
-          <a:p>
-            <a:pPr marL="283464" indent="-283464">
-              <a:spcAft>
-                <a:spcPts val="600"/>
-              </a:spcAft>
-              <a:buFont typeface="Arial"/>
-              <a:buChar char="•"/>
-            </a:pPr>
-            <a:r>
-              <a:rPr sz="1700" b="0" i="0" u="none">
-                <a:solidFill>
-                  <a:srgbClr val="000000"/>
-                </a:solidFill>
-                <a:latin typeface="Times New Roman"/>
-              </a:rPr>
-              <a:t>The 15 A fuse is the backstop if the electronics fail completely</a:t>
-            </a:r>
-          </a:p>
-          <a:p>
-            <a:pPr marL="283464" indent="-283464">
-              <a:spcAft>
-                <a:spcPts val="600"/>
-              </a:spcAft>
-              <a:buFont typeface="Arial"/>
-              <a:buChar char="•"/>
-            </a:pPr>
-            <a:r>
-              <a:rPr sz="1700" b="0" i="0" u="none">
-                <a:solidFill>
-                  <a:srgbClr val="000000"/>
-                </a:solidFill>
-                <a:latin typeface="Times New Roman"/>
-              </a:rPr>
-              <a:t>Both switches sit in the negative return, so both gates drive against ground</a:t>
-            </a:r>
-          </a:p>
-        </p:txBody>
-      </p:sp>
       <p:pic>
         <p:nvPicPr>
-          <p:cNvPr id="8" name="Picture 7" descr="03_power_path_sld.png"/>
+          <p:cNvPr id="7" name="Picture 6" descr="04_voltage_sense_schematic.png"/>
           <p:cNvPicPr>
             <a:picLocks noChangeAspect="1"/>
           </p:cNvPicPr>
@@ -13523,14 +12949,167 @@
         </p:blipFill>
         <p:spPr>
           <a:xfrm>
-            <a:off x="1096422" y="2267712"/>
-            <a:ext cx="9996107" cy="3858768"/>
+            <a:off x="658368" y="1769728"/>
+            <a:ext cx="5230368" cy="2815622"/>
           </a:xfrm>
           <a:prstGeom prst="rect">
             <a:avLst/>
           </a:prstGeom>
         </p:spPr>
       </p:pic>
+      <p:sp>
+        <p:nvSpPr>
+          <p:cNvPr id="8" name="TextBox 7"/>
+          <p:cNvSpPr txBox="1"/>
+          <p:nvPr/>
+        </p:nvSpPr>
+        <p:spPr>
+          <a:xfrm>
+            <a:off x="658368" y="1243584"/>
+            <a:ext cx="5230368" cy="310896"/>
+          </a:xfrm>
+          <a:prstGeom prst="rect">
+            <a:avLst/>
+          </a:prstGeom>
+          <a:noFill/>
+        </p:spPr>
+        <p:txBody>
+          <a:bodyPr wrap="square" lIns="0" rIns="0" tIns="0" bIns="0">
+            <a:noAutofit/>
+          </a:bodyPr>
+          <a:lstStyle/>
+          <a:p>
+            <a:pPr algn="ctr"/>
+            <a:r>
+              <a:rPr sz="1600" b="1" i="0" u="none">
+                <a:solidFill>
+                  <a:srgbClr val="000000"/>
+                </a:solidFill>
+                <a:latin typeface="Times New Roman"/>
+              </a:rPr>
+              <a:t>Cell voltage</a:t>
+            </a:r>
+          </a:p>
+        </p:txBody>
+      </p:sp>
+      <p:pic>
+        <p:nvPicPr>
+          <p:cNvPr id="9" name="Picture 8" descr="05_ntc_schematic.png"/>
+          <p:cNvPicPr>
+            <a:picLocks noChangeAspect="1"/>
+          </p:cNvPicPr>
+          <p:nvPr/>
+        </p:nvPicPr>
+        <p:blipFill>
+          <a:blip r:embed="rId4"/>
+          <a:stretch>
+            <a:fillRect/>
+          </a:stretch>
+        </p:blipFill>
+        <p:spPr>
+          <a:xfrm>
+            <a:off x="6300216" y="1970349"/>
+            <a:ext cx="5230368" cy="2414381"/>
+          </a:xfrm>
+          <a:prstGeom prst="rect">
+            <a:avLst/>
+          </a:prstGeom>
+        </p:spPr>
+      </p:pic>
+      <p:sp>
+        <p:nvSpPr>
+          <p:cNvPr id="10" name="TextBox 9"/>
+          <p:cNvSpPr txBox="1"/>
+          <p:nvPr/>
+        </p:nvSpPr>
+        <p:spPr>
+          <a:xfrm>
+            <a:off x="6300216" y="1243584"/>
+            <a:ext cx="5230368" cy="310896"/>
+          </a:xfrm>
+          <a:prstGeom prst="rect">
+            <a:avLst/>
+          </a:prstGeom>
+          <a:noFill/>
+        </p:spPr>
+        <p:txBody>
+          <a:bodyPr wrap="square" lIns="0" rIns="0" tIns="0" bIns="0">
+            <a:noAutofit/>
+          </a:bodyPr>
+          <a:lstStyle/>
+          <a:p>
+            <a:pPr algn="ctr"/>
+            <a:r>
+              <a:rPr sz="1600" b="1" i="0" u="none">
+                <a:solidFill>
+                  <a:srgbClr val="000000"/>
+                </a:solidFill>
+                <a:latin typeface="Times New Roman"/>
+              </a:rPr>
+              <a:t>Cell temperature</a:t>
+            </a:r>
+          </a:p>
+        </p:txBody>
+      </p:sp>
+      <p:sp>
+        <p:nvSpPr>
+          <p:cNvPr id="11" name="TextBox 10"/>
+          <p:cNvSpPr txBox="1"/>
+          <p:nvPr/>
+        </p:nvSpPr>
+        <p:spPr>
+          <a:xfrm>
+            <a:off x="1168603" y="4928616"/>
+            <a:ext cx="10195560" cy="1216152"/>
+          </a:xfrm>
+          <a:prstGeom prst="rect">
+            <a:avLst/>
+          </a:prstGeom>
+          <a:noFill/>
+        </p:spPr>
+        <p:txBody>
+          <a:bodyPr wrap="square" lIns="0" rIns="0" tIns="0" bIns="0">
+            <a:noAutofit/>
+          </a:bodyPr>
+          <a:lstStyle/>
+          <a:p>
+            <a:pPr marL="283464" indent="-283464">
+              <a:spcAft>
+                <a:spcPts val="800"/>
+              </a:spcAft>
+              <a:buFont typeface="Arial"/>
+              <a:buChar char="•"/>
+            </a:pPr>
+            <a:r>
+              <a:rPr sz="1700" b="0" i="0" u="none">
+                <a:solidFill>
+                  <a:srgbClr val="000000"/>
+                </a:solidFill>
+                <a:latin typeface="Times New Roman"/>
+              </a:rPr>
+              <a:t>Divider ratio 0.128 puts a full 16.8 V pack at 2.15 V — about 4.7 mV per count</a:t>
+            </a:r>
+          </a:p>
+          <a:p>
+            <a:pPr marL="283464" indent="-283464">
+              <a:spcAft>
+                <a:spcPts val="800"/>
+              </a:spcAft>
+              <a:buFont typeface="Arial"/>
+              <a:buChar char="•"/>
+            </a:pPr>
+            <a:r>
+              <a:rPr sz="1700" b="0" i="0" u="none">
+                <a:solidFill>
+                  <a:srgbClr val="000000"/>
+                </a:solidFill>
+                <a:latin typeface="Times New Roman"/>
+              </a:rPr>
+              <a:t>Beta equation: 1/T = 1/T₀ + (1/β)·ln(R/R₀), with T₀ = 298.15 K, R₀ = 10 kΩ, β = 3950 K</a:t>
+            </a:r>
+          </a:p>
+        </p:txBody>
+      </p:sp>
     </p:spTree>
   </p:cSld>
   <p:clrMapOvr>
